--- a/cv_matcher_presentation.pptx
+++ b/cv_matcher_presentation.pptx
@@ -4,18 +4,17 @@
   <p:sldMasterIdLst>
     <p:sldMasterId id="2147483648" r:id="rId1"/>
   </p:sldMasterIdLst>
+  <p:notesMasterIdLst>
+    <p:notesMasterId r:id="rId7"/>
+  </p:notesMasterIdLst>
   <p:sldIdLst>
     <p:sldId id="256" r:id="rId2"/>
     <p:sldId id="257" r:id="rId3"/>
     <p:sldId id="258" r:id="rId4"/>
-    <p:sldId id="259" r:id="rId5"/>
-    <p:sldId id="260" r:id="rId6"/>
-    <p:sldId id="261" r:id="rId7"/>
+    <p:sldId id="260" r:id="rId5"/>
+    <p:sldId id="261" r:id="rId6"/>
   </p:sldIdLst>
-  <p:notesMasterIdLst>
-    <p:notesMasterId r:id="rId8"/>
-  </p:notesMasterIdLst>
-  <p:sldSz cx="9144000" cy="5143500"/>
+  <p:sldSz cx="9144000" cy="5143500" type="screen16x9"/>
   <p:notesSz cx="5143500" cy="9144000"/>
   <p:defaultTextStyle>
     <a:lvl1pPr marL="0" algn="l" defTabSz="914400" rtl="0" eaLnBrk="1" latinLnBrk="0" hangingPunct="1">
@@ -109,6 +108,11 @@
       </a:defRPr>
     </a:lvl9pPr>
   </p:defaultTextStyle>
+  <p:extLst>
+    <p:ext uri="{EFAFB233-063F-42B5-8137-9DF3F51BA10A}">
+      <p15:sldGuideLst xmlns:p15="http://schemas.microsoft.com/office/powerpoint/2012/main"/>
+    </p:ext>
+  </p:extLst>
 </p:presentation>
 </file>
 
@@ -134,234 +138,10 @@
           <a:chExt cx="0" cy="0"/>
         </a:xfrm>
       </p:grpSpPr>
-      <p:sp>
-        <p:nvSpPr>
-          <p:cNvPr id="2" name="Header Placeholder 1"/>
-          <p:cNvSpPr>
-            <a:spLocks noGrp="1"/>
-          </p:cNvSpPr>
-          <p:nvPr>
-            <p:ph type="hdr" sz="quarter"/>
-          </p:nvPr>
-        </p:nvSpPr>
-        <p:spPr>
-          <a:xfrm>
-            <a:off x="0" y="0"/>
-            <a:ext cx="2971800" cy="458788"/>
-          </a:xfrm>
-          <a:prstGeom prst="rect">
-            <a:avLst/>
-          </a:prstGeom>
-        </p:spPr>
-        <p:txBody>
-          <a:bodyPr vert="horz" lIns="91440" tIns="45720" rIns="91440" bIns="45720" rtlCol="0"/>
-          <a:lstStyle>
-            <a:lvl1pPr algn="l">
-              <a:defRPr sz="1200"/>
-            </a:lvl1pPr>
-          </a:lstStyle>
-          <a:p>
-            <a:endParaRPr lang="en-US"/>
-          </a:p>
-        </p:txBody>
-      </p:sp>
-      <p:sp>
-        <p:nvSpPr>
-          <p:cNvPr id="3" name="Date Placeholder 2"/>
-          <p:cNvSpPr>
-            <a:spLocks noGrp="1"/>
-          </p:cNvSpPr>
-          <p:nvPr>
-            <p:ph type="dt" idx="1"/>
-          </p:nvPr>
-        </p:nvSpPr>
-        <p:spPr>
-          <a:xfrm>
-            <a:off x="3884613" y="0"/>
-            <a:ext cx="2971800" cy="458788"/>
-          </a:xfrm>
-          <a:prstGeom prst="rect">
-            <a:avLst/>
-          </a:prstGeom>
-        </p:spPr>
-        <p:txBody>
-          <a:bodyPr vert="horz" lIns="91440" tIns="45720" rIns="91440" bIns="45720" rtlCol="0"/>
-          <a:lstStyle>
-            <a:lvl1pPr algn="r">
-              <a:defRPr sz="1200"/>
-            </a:lvl1pPr>
-          </a:lstStyle>
-          <a:p>
-            <a:fld id="{5282F153-3F37-0F45-9E97-73ACFA13230C}" type="datetimeFigureOut">
-              <a:rPr lang="en-US"/>
-              <a:t>7/23/19</a:t>
-            </a:fld>
-            <a:endParaRPr lang="en-US"/>
-          </a:p>
-        </p:txBody>
-      </p:sp>
-      <p:sp>
-        <p:nvSpPr>
-          <p:cNvPr id="4" name="Slide Image Placeholder 3"/>
-          <p:cNvSpPr>
-            <a:spLocks noGrp="1" noRot="1" noChangeAspect="1"/>
-          </p:cNvSpPr>
-          <p:nvPr>
-            <p:ph type="sldImg" idx="2"/>
-          </p:nvPr>
-        </p:nvSpPr>
-        <p:spPr>
-          <a:xfrm>
-            <a:off x="685800" y="1143000"/>
-            <a:ext cx="5486400" cy="3086100"/>
-          </a:xfrm>
-          <a:prstGeom prst="rect">
-            <a:avLst/>
-          </a:prstGeom>
-          <a:noFill/>
-          <a:ln w="12700">
-            <a:solidFill>
-              <a:prstClr val="black"/>
-            </a:solidFill>
-          </a:ln>
-        </p:spPr>
-        <p:txBody>
-          <a:bodyPr vert="horz" lIns="91440" tIns="45720" rIns="91440" bIns="45720" rtlCol="0" anchor="ctr"/>
-          <a:lstStyle/>
-          <a:p>
-            <a:endParaRPr lang="en-US"/>
-          </a:p>
-        </p:txBody>
-      </p:sp>
-      <p:sp>
-        <p:nvSpPr>
-          <p:cNvPr id="5" name="Notes Placeholder 4"/>
-          <p:cNvSpPr>
-            <a:spLocks noGrp="1"/>
-          </p:cNvSpPr>
-          <p:nvPr>
-            <p:ph type="body" sz="quarter" idx="3"/>
-          </p:nvPr>
-        </p:nvSpPr>
-        <p:spPr>
-          <a:xfrm>
-            <a:off x="685800" y="4400550"/>
-            <a:ext cx="5486400" cy="3600450"/>
-          </a:xfrm>
-          <a:prstGeom prst="rect">
-            <a:avLst/>
-          </a:prstGeom>
-        </p:spPr>
-        <p:txBody>
-          <a:bodyPr vert="horz" lIns="91440" tIns="45720" rIns="91440" bIns="45720" rtlCol="0"/>
-          <a:lstStyle/>
-          <a:p>
-            <a:pPr lvl="0"/>
-            <a:r>
-              <a:rPr lang="en-US"/>
-              <a:t>Click to edit Master text styles</a:t>
-            </a:r>
-          </a:p>
-          <a:p>
-            <a:pPr lvl="1"/>
-            <a:r>
-              <a:rPr lang="en-US"/>
-              <a:t>Second level</a:t>
-            </a:r>
-          </a:p>
-          <a:p>
-            <a:pPr lvl="2"/>
-            <a:r>
-              <a:rPr lang="en-US"/>
-              <a:t>Third level</a:t>
-            </a:r>
-          </a:p>
-          <a:p>
-            <a:pPr lvl="3"/>
-            <a:r>
-              <a:rPr lang="en-US"/>
-              <a:t>Fourth level</a:t>
-            </a:r>
-          </a:p>
-          <a:p>
-            <a:pPr lvl="4"/>
-            <a:r>
-              <a:rPr lang="en-US"/>
-              <a:t>Fifth level</a:t>
-            </a:r>
-          </a:p>
-        </p:txBody>
-      </p:sp>
-      <p:sp>
-        <p:nvSpPr>
-          <p:cNvPr id="6" name="Footer Placeholder 5"/>
-          <p:cNvSpPr>
-            <a:spLocks noGrp="1"/>
-          </p:cNvSpPr>
-          <p:nvPr>
-            <p:ph type="ftr" sz="quarter" idx="4"/>
-          </p:nvPr>
-        </p:nvSpPr>
-        <p:spPr>
-          <a:xfrm>
-            <a:off x="0" y="8685213"/>
-            <a:ext cx="2971800" cy="458787"/>
-          </a:xfrm>
-          <a:prstGeom prst="rect">
-            <a:avLst/>
-          </a:prstGeom>
-        </p:spPr>
-        <p:txBody>
-          <a:bodyPr vert="horz" lIns="91440" tIns="45720" rIns="91440" bIns="45720" rtlCol="0" anchor="b"/>
-          <a:lstStyle>
-            <a:lvl1pPr algn="l">
-              <a:defRPr sz="1200"/>
-            </a:lvl1pPr>
-          </a:lstStyle>
-          <a:p>
-            <a:endParaRPr lang="en-US"/>
-          </a:p>
-        </p:txBody>
-      </p:sp>
-      <p:sp>
-        <p:nvSpPr>
-          <p:cNvPr id="7" name="Slide Number Placeholder 6"/>
-          <p:cNvSpPr>
-            <a:spLocks noGrp="1"/>
-          </p:cNvSpPr>
-          <p:nvPr>
-            <p:ph type="sldNum" sz="quarter" idx="5"/>
-          </p:nvPr>
-        </p:nvSpPr>
-        <p:spPr>
-          <a:xfrm>
-            <a:off x="3884613" y="8685213"/>
-            <a:ext cx="2971800" cy="458787"/>
-          </a:xfrm>
-          <a:prstGeom prst="rect">
-            <a:avLst/>
-          </a:prstGeom>
-        </p:spPr>
-        <p:txBody>
-          <a:bodyPr vert="horz" lIns="91440" tIns="45720" rIns="91440" bIns="45720" rtlCol="0" anchor="b"/>
-          <a:lstStyle>
-            <a:lvl1pPr algn="r">
-              <a:defRPr sz="1200"/>
-            </a:lvl1pPr>
-          </a:lstStyle>
-          <a:p>
-            <a:fld id="{CE5E9CC1-C706-0F49-92D6-E571CC5EEA8F}" type="slidenum">
-              <a:rPr lang="en-US"/>
-              <a:t>‹#›</a:t>
-            </a:fld>
-            <a:endParaRPr lang="en-US"/>
-          </a:p>
-        </p:txBody>
-      </p:sp>
     </p:spTree>
     <p:extLst>
       <p:ext uri="{BB962C8B-B14F-4D97-AF65-F5344CB8AC3E}">
-        <p14:creationId xmlns:p14="http://schemas.microsoft.com/office/powerpoint/2010/main" val="1024086991"/>
+        <p14:creationId xmlns:p14="http://schemas.microsoft.com/office/powerpoint/2010/main" val="2165170208"/>
       </p:ext>
     </p:extLst>
   </p:cSld>
@@ -505,10 +285,6 @@
           <a:bodyPr/>
           <a:lstStyle/>
           <a:p>
-            <a:r>
-              <a:rPr lang="en-US" dirty="0"/>
-              <a:t/>
-            </a:r>
             <a:endParaRPr lang="en-US" dirty="0"/>
           </a:p>
         </p:txBody>
@@ -593,10 +369,6 @@
           <a:bodyPr/>
           <a:lstStyle/>
           <a:p>
-            <a:r>
-              <a:rPr lang="en-US" dirty="0"/>
-              <a:t/>
-            </a:r>
             <a:endParaRPr lang="en-US" dirty="0"/>
           </a:p>
         </p:txBody>
@@ -681,10 +453,6 @@
           <a:bodyPr/>
           <a:lstStyle/>
           <a:p>
-            <a:r>
-              <a:rPr lang="en-US" dirty="0"/>
-              <a:t/>
-            </a:r>
             <a:endParaRPr lang="en-US" dirty="0"/>
           </a:p>
         </p:txBody>
@@ -769,10 +537,6 @@
           <a:bodyPr/>
           <a:lstStyle/>
           <a:p>
-            <a:r>
-              <a:rPr lang="en-US" dirty="0"/>
-              <a:t/>
-            </a:r>
             <a:endParaRPr lang="en-US" dirty="0"/>
           </a:p>
         </p:txBody>
@@ -857,10 +621,6 @@
           <a:bodyPr/>
           <a:lstStyle/>
           <a:p>
-            <a:r>
-              <a:rPr lang="en-US" dirty="0"/>
-              <a:t/>
-            </a:r>
             <a:endParaRPr lang="en-US" dirty="0"/>
           </a:p>
         </p:txBody>
@@ -883,94 +643,6 @@
             <a:fld id="{F7021451-1387-4CA6-816F-3879F97B5CBC}" type="slidenum">
               <a:rPr lang="en-US"/>
               <a:t>5</a:t>
-            </a:fld>
-            <a:endParaRPr lang="en-US"/>
-          </a:p>
-        </p:txBody>
-      </p:sp>
-    </p:spTree>
-    <p:extLst>
-      <p:ext uri="{BB962C8B-B14F-4D97-AF65-F5344CB8AC3E}">
-        <p14:creationId xmlns:p14="http://schemas.microsoft.com/office/powerpoint/2010/main" val="1024086991"/>
-      </p:ext>
-    </p:extLst>
-  </p:cSld>
-  <p:clrMapOvr>
-    <a:masterClrMapping/>
-  </p:clrMapOvr>
-</p:notes>
-</file>
-
-<file path=ppt/notesSlides/notesSlide6.xml><?xml version="1.0" encoding="utf-8"?>
-<p:notes xmlns:a="http://schemas.openxmlformats.org/drawingml/2006/main" xmlns:r="http://schemas.openxmlformats.org/officeDocument/2006/relationships" xmlns:p="http://schemas.openxmlformats.org/presentationml/2006/main">
-  <p:cSld>
-    <p:spTree>
-      <p:nvGrpSpPr>
-        <p:cNvPr id="1" name=""/>
-        <p:cNvGrpSpPr/>
-        <p:nvPr/>
-      </p:nvGrpSpPr>
-      <p:grpSpPr>
-        <a:xfrm>
-          <a:off x="0" y="0"/>
-          <a:ext cx="0" cy="0"/>
-          <a:chOff x="0" y="0"/>
-          <a:chExt cx="0" cy="0"/>
-        </a:xfrm>
-      </p:grpSpPr>
-      <p:sp>
-        <p:nvSpPr>
-          <p:cNvPr id="2" name="Slide Image Placeholder 1"/>
-          <p:cNvSpPr>
-            <a:spLocks noGrp="1" noRot="1" noChangeAspect="1"/>
-          </p:cNvSpPr>
-          <p:nvPr>
-            <p:ph type="sldImg"/>
-          </p:nvPr>
-        </p:nvSpPr>
-        <p:spPr/>
-      </p:sp>
-      <p:sp>
-        <p:nvSpPr>
-          <p:cNvPr id="3" name="Notes Placeholder 2"/>
-          <p:cNvSpPr>
-            <a:spLocks noGrp="1"/>
-          </p:cNvSpPr>
-          <p:nvPr>
-            <p:ph type="body" idx="1"/>
-          </p:nvPr>
-        </p:nvSpPr>
-        <p:spPr/>
-        <p:txBody>
-          <a:bodyPr/>
-          <a:lstStyle/>
-          <a:p>
-            <a:r>
-              <a:rPr lang="en-US" dirty="0"/>
-              <a:t/>
-            </a:r>
-            <a:endParaRPr lang="en-US" dirty="0"/>
-          </a:p>
-        </p:txBody>
-      </p:sp>
-      <p:sp>
-        <p:nvSpPr>
-          <p:cNvPr id="4" name="Slide Number Placeholder 3"/>
-          <p:cNvSpPr>
-            <a:spLocks noGrp="1"/>
-          </p:cNvSpPr>
-          <p:nvPr>
-            <p:ph type="sldNum" sz="quarter" idx="10"/>
-          </p:nvPr>
-        </p:nvSpPr>
-        <p:spPr/>
-        <p:txBody>
-          <a:bodyPr/>
-          <a:lstStyle/>
-          <a:p>
-            <a:fld id="{F7021451-1387-4CA6-816F-3879F97B5CBC}" type="slidenum">
-              <a:rPr lang="en-US"/>
-              <a:t>6</a:t>
             </a:fld>
             <a:endParaRPr lang="en-US"/>
           </a:p>
@@ -1022,6 +694,11 @@
 <file path=ppt/slideMasters/slideMaster1.xml><?xml version="1.0" encoding="utf-8"?>
 <p:sldMaster xmlns:a="http://schemas.openxmlformats.org/drawingml/2006/main" xmlns:r="http://schemas.openxmlformats.org/officeDocument/2006/relationships" xmlns:p="http://schemas.openxmlformats.org/presentationml/2006/main">
   <p:cSld>
+    <p:bg>
+      <p:bgRef idx="1001">
+        <a:schemeClr val="bg1"/>
+      </p:bgRef>
+    </p:bg>
     <p:spTree>
       <p:nvGrpSpPr>
         <p:cNvPr id="1" name=""/>
@@ -1304,6 +981,7 @@
         <a:solidFill>
           <a:srgbClr val="1E2761"/>
         </a:solidFill>
+        <a:effectLst/>
       </p:bgPr>
     </p:bg>
     <p:spTree>
@@ -1344,6 +1022,13 @@
             <a:prstDash val="solid"/>
           </a:ln>
         </p:spPr>
+        <p:txBody>
+          <a:bodyPr/>
+          <a:lstStyle/>
+          <a:p>
+            <a:endParaRPr lang="en-US"/>
+          </a:p>
+        </p:txBody>
       </p:sp>
       <p:sp>
         <p:nvSpPr>
@@ -1369,6 +1054,13 @@
             <a:prstDash val="solid"/>
           </a:ln>
         </p:spPr>
+        <p:txBody>
+          <a:bodyPr/>
+          <a:lstStyle/>
+          <a:p>
+            <a:endParaRPr lang="en-US"/>
+          </a:p>
+        </p:txBody>
       </p:sp>
       <p:sp>
         <p:nvSpPr>
@@ -1391,7 +1083,7 @@
           <a:bodyPr wrap="square" rtlCol="0" anchor="ctr"/>
           <a:lstStyle/>
           <a:p>
-            <a:pPr indent="0" marL="0">
+            <a:pPr marL="0" indent="0">
               <a:buNone/>
             </a:pPr>
             <a:r>
@@ -1403,7 +1095,7 @@
                 <a:ea typeface="Calibri" pitchFamily="34" charset="-122"/>
                 <a:cs typeface="Calibri" pitchFamily="34" charset="-120"/>
               </a:rPr>
-              <a:t>CV Matcher</a:t>
+              <a:t>CV Candidate Analysis Support System</a:t>
             </a:r>
             <a:endParaRPr lang="en-US" sz="5200" dirty="0"/>
           </a:p>
@@ -1430,7 +1122,7 @@
           <a:bodyPr wrap="square" rtlCol="0" anchor="ctr"/>
           <a:lstStyle/>
           <a:p>
-            <a:pPr indent="0" marL="0">
+            <a:pPr marL="0" indent="0">
               <a:buNone/>
             </a:pPr>
             <a:r>
@@ -1447,7 +1139,7 @@
             <a:endParaRPr lang="en-US" sz="1800" dirty="0"/>
           </a:p>
           <a:p>
-            <a:pPr indent="0" marL="0">
+            <a:pPr marL="0" indent="0">
               <a:buNone/>
             </a:pPr>
             <a:r>
@@ -1486,7 +1178,7 @@
           <a:bodyPr wrap="square" rtlCol="0" anchor="ctr"/>
           <a:lstStyle/>
           <a:p>
-            <a:pPr indent="0" marL="0">
+            <a:pPr marL="0" indent="0">
               <a:buNone/>
             </a:pPr>
             <a:r>
@@ -1520,6 +1212,7 @@
         <a:solidFill>
           <a:srgbClr val="F4F6FB"/>
         </a:solidFill>
+        <a:effectLst/>
       </p:bgPr>
     </p:bg>
     <p:spTree>
@@ -1557,7 +1250,7 @@
           <a:bodyPr wrap="square" rtlCol="0" anchor="ctr"/>
           <a:lstStyle/>
           <a:p>
-            <a:pPr indent="0" marL="0">
+            <a:pPr marL="0" indent="0">
               <a:buNone/>
             </a:pPr>
             <a:r>
@@ -1599,13 +1292,20 @@
             <a:prstDash val="solid"/>
           </a:ln>
           <a:effectLst>
-            <a:outerShdw sx="100000" sy="100000" kx="0" ky="0" algn="bl" rotWithShape="0" blurRad="101600" dist="25400" dir="8100000">
+            <a:outerShdw blurRad="101600" dist="25400" dir="8100000" algn="bl" rotWithShape="0">
               <a:srgbClr val="000000">
                 <a:alpha val="8000"/>
               </a:srgbClr>
             </a:outerShdw>
           </a:effectLst>
         </p:spPr>
+        <p:txBody>
+          <a:bodyPr/>
+          <a:lstStyle/>
+          <a:p>
+            <a:endParaRPr lang="en-US"/>
+          </a:p>
+        </p:txBody>
       </p:sp>
       <p:sp>
         <p:nvSpPr>
@@ -1631,6 +1331,13 @@
             <a:prstDash val="solid"/>
           </a:ln>
         </p:spPr>
+        <p:txBody>
+          <a:bodyPr/>
+          <a:lstStyle/>
+          <a:p>
+            <a:endParaRPr lang="en-US"/>
+          </a:p>
+        </p:txBody>
       </p:sp>
       <p:sp>
         <p:nvSpPr>
@@ -1653,7 +1360,7 @@
           <a:bodyPr wrap="square" lIns="0" tIns="0" rIns="0" bIns="0" rtlCol="0" anchor="ctr"/>
           <a:lstStyle/>
           <a:p>
-            <a:pPr algn="ctr" indent="0" marL="0">
+            <a:pPr marL="0" indent="0" algn="ctr">
               <a:buNone/>
             </a:pPr>
             <a:r>
@@ -1689,7 +1396,7 @@
           <a:bodyPr wrap="square" lIns="0" tIns="0" rIns="0" bIns="0" rtlCol="0" anchor="ctr"/>
           <a:lstStyle/>
           <a:p>
-            <a:pPr indent="0" marL="0">
+            <a:pPr marL="0" indent="0">
               <a:buNone/>
             </a:pPr>
             <a:r>
@@ -1728,7 +1435,7 @@
           <a:bodyPr wrap="square" lIns="0" tIns="0" rIns="0" bIns="0" rtlCol="0" anchor="ctr"/>
           <a:lstStyle/>
           <a:p>
-            <a:pPr indent="0" marL="0">
+            <a:pPr marL="0" indent="0">
               <a:buNone/>
             </a:pPr>
             <a:r>
@@ -1770,13 +1477,20 @@
             <a:prstDash val="solid"/>
           </a:ln>
           <a:effectLst>
-            <a:outerShdw sx="100000" sy="100000" kx="0" ky="0" algn="bl" rotWithShape="0" blurRad="101600" dist="25400" dir="8100000">
+            <a:outerShdw blurRad="101600" dist="25400" dir="8100000" algn="bl" rotWithShape="0">
               <a:srgbClr val="000000">
                 <a:alpha val="8000"/>
               </a:srgbClr>
             </a:outerShdw>
           </a:effectLst>
         </p:spPr>
+        <p:txBody>
+          <a:bodyPr/>
+          <a:lstStyle/>
+          <a:p>
+            <a:endParaRPr lang="en-US"/>
+          </a:p>
+        </p:txBody>
       </p:sp>
       <p:sp>
         <p:nvSpPr>
@@ -1802,6 +1516,13 @@
             <a:prstDash val="solid"/>
           </a:ln>
         </p:spPr>
+        <p:txBody>
+          <a:bodyPr/>
+          <a:lstStyle/>
+          <a:p>
+            <a:endParaRPr lang="en-US"/>
+          </a:p>
+        </p:txBody>
       </p:sp>
       <p:sp>
         <p:nvSpPr>
@@ -1824,7 +1545,7 @@
           <a:bodyPr wrap="square" lIns="0" tIns="0" rIns="0" bIns="0" rtlCol="0" anchor="ctr"/>
           <a:lstStyle/>
           <a:p>
-            <a:pPr algn="ctr" indent="0" marL="0">
+            <a:pPr marL="0" indent="0" algn="ctr">
               <a:buNone/>
             </a:pPr>
             <a:r>
@@ -1860,7 +1581,7 @@
           <a:bodyPr wrap="square" lIns="0" tIns="0" rIns="0" bIns="0" rtlCol="0" anchor="ctr"/>
           <a:lstStyle/>
           <a:p>
-            <a:pPr indent="0" marL="0">
+            <a:pPr marL="0" indent="0">
               <a:buNone/>
             </a:pPr>
             <a:r>
@@ -1899,7 +1620,7 @@
           <a:bodyPr wrap="square" lIns="0" tIns="0" rIns="0" bIns="0" rtlCol="0" anchor="ctr"/>
           <a:lstStyle/>
           <a:p>
-            <a:pPr indent="0" marL="0">
+            <a:pPr marL="0" indent="0">
               <a:buNone/>
             </a:pPr>
             <a:r>
@@ -1941,13 +1662,20 @@
             <a:prstDash val="solid"/>
           </a:ln>
           <a:effectLst>
-            <a:outerShdw sx="100000" sy="100000" kx="0" ky="0" algn="bl" rotWithShape="0" blurRad="101600" dist="25400" dir="8100000">
+            <a:outerShdw blurRad="101600" dist="25400" dir="8100000" algn="bl" rotWithShape="0">
               <a:srgbClr val="000000">
                 <a:alpha val="8000"/>
               </a:srgbClr>
             </a:outerShdw>
           </a:effectLst>
         </p:spPr>
+        <p:txBody>
+          <a:bodyPr/>
+          <a:lstStyle/>
+          <a:p>
+            <a:endParaRPr lang="en-US"/>
+          </a:p>
+        </p:txBody>
       </p:sp>
       <p:sp>
         <p:nvSpPr>
@@ -1973,6 +1701,13 @@
             <a:prstDash val="solid"/>
           </a:ln>
         </p:spPr>
+        <p:txBody>
+          <a:bodyPr/>
+          <a:lstStyle/>
+          <a:p>
+            <a:endParaRPr lang="en-US"/>
+          </a:p>
+        </p:txBody>
       </p:sp>
       <p:sp>
         <p:nvSpPr>
@@ -1995,7 +1730,7 @@
           <a:bodyPr wrap="square" lIns="0" tIns="0" rIns="0" bIns="0" rtlCol="0" anchor="ctr"/>
           <a:lstStyle/>
           <a:p>
-            <a:pPr algn="ctr" indent="0" marL="0">
+            <a:pPr marL="0" indent="0" algn="ctr">
               <a:buNone/>
             </a:pPr>
             <a:r>
@@ -2031,7 +1766,7 @@
           <a:bodyPr wrap="square" lIns="0" tIns="0" rIns="0" bIns="0" rtlCol="0" anchor="ctr"/>
           <a:lstStyle/>
           <a:p>
-            <a:pPr indent="0" marL="0">
+            <a:pPr marL="0" indent="0">
               <a:buNone/>
             </a:pPr>
             <a:r>
@@ -2070,7 +1805,7 @@
           <a:bodyPr wrap="square" lIns="0" tIns="0" rIns="0" bIns="0" rtlCol="0" anchor="ctr"/>
           <a:lstStyle/>
           <a:p>
-            <a:pPr indent="0" marL="0">
+            <a:pPr marL="0" indent="0">
               <a:buNone/>
             </a:pPr>
             <a:r>
@@ -2104,6 +1839,7 @@
         <a:solidFill>
           <a:srgbClr val="1E2761"/>
         </a:solidFill>
+        <a:effectLst/>
       </p:bgPr>
     </p:bg>
     <p:spTree>
@@ -2141,7 +1877,7 @@
           <a:bodyPr wrap="square" rtlCol="0" anchor="ctr"/>
           <a:lstStyle/>
           <a:p>
-            <a:pPr indent="0" marL="0">
+            <a:pPr marL="0" indent="0">
               <a:buNone/>
             </a:pPr>
             <a:r>
@@ -2156,45 +1892,6 @@
               <a:t>A Solução</a:t>
             </a:r>
             <a:endParaRPr lang="en-US" sz="3200" dirty="0"/>
-          </a:p>
-        </p:txBody>
-      </p:sp>
-      <p:sp>
-        <p:nvSpPr>
-          <p:cNvPr id="3" name="Text 1"/>
-          <p:cNvSpPr/>
-          <p:nvPr/>
-        </p:nvSpPr>
-        <p:spPr>
-          <a:xfrm>
-            <a:off x="548640" y="868680"/>
-            <a:ext cx="7772400" cy="365760"/>
-          </a:xfrm>
-          <a:prstGeom prst="rect">
-            <a:avLst/>
-          </a:prstGeom>
-          <a:noFill/>
-          <a:ln/>
-        </p:spPr>
-        <p:txBody>
-          <a:bodyPr wrap="square" rtlCol="0" anchor="ctr"/>
-          <a:lstStyle/>
-          <a:p>
-            <a:pPr indent="0" marL="0">
-              <a:buNone/>
-            </a:pPr>
-            <a:r>
-              <a:rPr lang="en-US" sz="1400" dirty="0">
-                <a:solidFill>
-                  <a:srgbClr val="CADCFC"/>
-                </a:solidFill>
-                <a:latin typeface="Calibri" pitchFamily="34" charset="0"/>
-                <a:ea typeface="Calibri" pitchFamily="34" charset="-122"/>
-                <a:cs typeface="Calibri" pitchFamily="34" charset="-120"/>
-              </a:rPr>
-              <a:t>Análise semântica com LLM — vai além das keywords</a:t>
-            </a:r>
-            <a:endParaRPr lang="en-US" sz="1400" dirty="0"/>
           </a:p>
         </p:txBody>
       </p:sp>
@@ -2224,6 +1921,13 @@
             <a:prstDash val="solid"/>
           </a:ln>
         </p:spPr>
+        <p:txBody>
+          <a:bodyPr/>
+          <a:lstStyle/>
+          <a:p>
+            <a:endParaRPr lang="en-US"/>
+          </a:p>
+        </p:txBody>
       </p:sp>
       <p:sp>
         <p:nvSpPr>
@@ -2246,7 +1950,7 @@
           <a:bodyPr wrap="square" lIns="0" tIns="0" rIns="0" bIns="0" rtlCol="0" anchor="ctr"/>
           <a:lstStyle/>
           <a:p>
-            <a:pPr algn="ctr" indent="0" marL="0">
+            <a:pPr marL="0" indent="0" algn="ctr">
               <a:buNone/>
             </a:pPr>
             <a:r>
@@ -2260,7 +1964,7 @@
             <a:endParaRPr lang="en-US" sz="1300" dirty="0"/>
           </a:p>
           <a:p>
-            <a:pPr algn="ctr" indent="0" marL="0">
+            <a:pPr marL="0" indent="0" algn="ctr">
               <a:buNone/>
             </a:pPr>
             <a:r>
@@ -2296,7 +2000,7 @@
           <a:bodyPr wrap="square" rtlCol="0" anchor="ctr"/>
           <a:lstStyle/>
           <a:p>
-            <a:pPr algn="ctr" indent="0" marL="0">
+            <a:pPr marL="0" indent="0" algn="ctr">
               <a:buNone/>
             </a:pPr>
             <a:r>
@@ -2337,6 +2041,13 @@
             <a:prstDash val="solid"/>
           </a:ln>
         </p:spPr>
+        <p:txBody>
+          <a:bodyPr/>
+          <a:lstStyle/>
+          <a:p>
+            <a:endParaRPr lang="en-US"/>
+          </a:p>
+        </p:txBody>
       </p:sp>
       <p:sp>
         <p:nvSpPr>
@@ -2359,7 +2070,7 @@
           <a:bodyPr wrap="square" lIns="0" tIns="0" rIns="0" bIns="0" rtlCol="0" anchor="ctr"/>
           <a:lstStyle/>
           <a:p>
-            <a:pPr algn="ctr" indent="0" marL="0">
+            <a:pPr marL="0" indent="0" algn="ctr">
               <a:buNone/>
             </a:pPr>
             <a:r>
@@ -2373,7 +2084,7 @@
             <a:endParaRPr lang="en-US" sz="1300" dirty="0"/>
           </a:p>
           <a:p>
-            <a:pPr algn="ctr" indent="0" marL="0">
+            <a:pPr marL="0" indent="0" algn="ctr">
               <a:buNone/>
             </a:pPr>
             <a:r>
@@ -2409,7 +2120,7 @@
           <a:bodyPr wrap="square" rtlCol="0" anchor="ctr"/>
           <a:lstStyle/>
           <a:p>
-            <a:pPr algn="ctr" indent="0" marL="0">
+            <a:pPr marL="0" indent="0" algn="ctr">
               <a:buNone/>
             </a:pPr>
             <a:r>
@@ -2450,6 +2161,13 @@
             <a:prstDash val="solid"/>
           </a:ln>
         </p:spPr>
+        <p:txBody>
+          <a:bodyPr/>
+          <a:lstStyle/>
+          <a:p>
+            <a:endParaRPr lang="en-US"/>
+          </a:p>
+        </p:txBody>
       </p:sp>
       <p:sp>
         <p:nvSpPr>
@@ -2472,7 +2190,7 @@
           <a:bodyPr wrap="square" lIns="0" tIns="0" rIns="0" bIns="0" rtlCol="0" anchor="ctr"/>
           <a:lstStyle/>
           <a:p>
-            <a:pPr algn="ctr" indent="0" marL="0">
+            <a:pPr marL="0" indent="0" algn="ctr">
               <a:buNone/>
             </a:pPr>
             <a:r>
@@ -2486,7 +2204,7 @@
             <a:endParaRPr lang="en-US" sz="1300" dirty="0"/>
           </a:p>
           <a:p>
-            <a:pPr algn="ctr" indent="0" marL="0">
+            <a:pPr marL="0" indent="0" algn="ctr">
               <a:buNone/>
             </a:pPr>
             <a:r>
@@ -2522,7 +2240,7 @@
           <a:bodyPr wrap="square" rtlCol="0" anchor="ctr"/>
           <a:lstStyle/>
           <a:p>
-            <a:pPr algn="ctr" indent="0" marL="0">
+            <a:pPr marL="0" indent="0" algn="ctr">
               <a:buNone/>
             </a:pPr>
             <a:r>
@@ -2545,7 +2263,7 @@
         </p:nvSpPr>
         <p:spPr>
           <a:xfrm>
-            <a:off x="7772400" y="1508760"/>
+            <a:off x="7589520" y="1508760"/>
             <a:ext cx="1463040" cy="822960"/>
           </a:xfrm>
           <a:prstGeom prst="roundRect">
@@ -2563,6 +2281,13 @@
             <a:prstDash val="solid"/>
           </a:ln>
         </p:spPr>
+        <p:txBody>
+          <a:bodyPr/>
+          <a:lstStyle/>
+          <a:p>
+            <a:endParaRPr lang="en-US"/>
+          </a:p>
+        </p:txBody>
       </p:sp>
       <p:sp>
         <p:nvSpPr>
@@ -2572,7 +2297,7 @@
         </p:nvSpPr>
         <p:spPr>
           <a:xfrm>
-            <a:off x="7772400" y="1508760"/>
+            <a:off x="7589520" y="1508760"/>
             <a:ext cx="1463040" cy="822960"/>
           </a:xfrm>
           <a:prstGeom prst="rect">
@@ -2585,7 +2310,7 @@
           <a:bodyPr wrap="square" lIns="0" tIns="0" rIns="0" bIns="0" rtlCol="0" anchor="ctr"/>
           <a:lstStyle/>
           <a:p>
-            <a:pPr algn="ctr" indent="0" marL="0">
+            <a:pPr marL="0" indent="0" algn="ctr">
               <a:buNone/>
             </a:pPr>
             <a:r>
@@ -2599,7 +2324,7 @@
             <a:endParaRPr lang="en-US" sz="1300" dirty="0"/>
           </a:p>
           <a:p>
-            <a:pPr algn="ctr" indent="0" marL="0">
+            <a:pPr marL="0" indent="0" algn="ctr">
               <a:buNone/>
             </a:pPr>
             <a:r>
@@ -2635,7 +2360,7 @@
           <a:bodyPr wrap="square" rtlCol="0" anchor="ctr"/>
           <a:lstStyle/>
           <a:p>
-            <a:pPr indent="0" marL="0">
+            <a:pPr marL="0" indent="0">
               <a:buNone/>
             </a:pPr>
             <a:r>
@@ -2677,13 +2402,20 @@
             <a:prstDash val="solid"/>
           </a:ln>
           <a:effectLst>
-            <a:outerShdw sx="100000" sy="100000" kx="0" ky="0" algn="bl" rotWithShape="0" blurRad="76200" dist="25400" dir="8100000">
+            <a:outerShdw blurRad="76200" dist="25400" dir="8100000" algn="bl" rotWithShape="0">
               <a:srgbClr val="000000">
                 <a:alpha val="20000"/>
               </a:srgbClr>
             </a:outerShdw>
           </a:effectLst>
         </p:spPr>
+        <p:txBody>
+          <a:bodyPr/>
+          <a:lstStyle/>
+          <a:p>
+            <a:endParaRPr lang="en-US"/>
+          </a:p>
+        </p:txBody>
       </p:sp>
       <p:sp>
         <p:nvSpPr>
@@ -2709,6 +2441,13 @@
             <a:prstDash val="solid"/>
           </a:ln>
         </p:spPr>
+        <p:txBody>
+          <a:bodyPr/>
+          <a:lstStyle/>
+          <a:p>
+            <a:endParaRPr lang="en-US"/>
+          </a:p>
+        </p:txBody>
       </p:sp>
       <p:sp>
         <p:nvSpPr>
@@ -2731,7 +2470,7 @@
           <a:bodyPr wrap="square" rtlCol="0" anchor="ctr"/>
           <a:lstStyle/>
           <a:p>
-            <a:pPr algn="ctr" indent="0" marL="0">
+            <a:pPr marL="0" indent="0" algn="ctr">
               <a:buNone/>
             </a:pPr>
             <a:r>
@@ -2745,7 +2484,7 @@
             <a:endParaRPr lang="en-US" sz="1300" dirty="0"/>
           </a:p>
           <a:p>
-            <a:pPr algn="ctr" indent="0" marL="0">
+            <a:pPr marL="0" indent="0" algn="ctr">
               <a:buNone/>
             </a:pPr>
             <a:r>
@@ -2781,7 +2520,7 @@
           <a:bodyPr wrap="square" rtlCol="0" anchor="ctr"/>
           <a:lstStyle/>
           <a:p>
-            <a:pPr algn="ctr" indent="0" marL="0">
+            <a:pPr marL="0" indent="0" algn="ctr">
               <a:buNone/>
             </a:pPr>
             <a:r>
@@ -2820,13 +2559,20 @@
             <a:prstDash val="solid"/>
           </a:ln>
           <a:effectLst>
-            <a:outerShdw sx="100000" sy="100000" kx="0" ky="0" algn="bl" rotWithShape="0" blurRad="76200" dist="25400" dir="8100000">
+            <a:outerShdw blurRad="76200" dist="25400" dir="8100000" algn="bl" rotWithShape="0">
               <a:srgbClr val="000000">
                 <a:alpha val="20000"/>
               </a:srgbClr>
             </a:outerShdw>
           </a:effectLst>
         </p:spPr>
+        <p:txBody>
+          <a:bodyPr/>
+          <a:lstStyle/>
+          <a:p>
+            <a:endParaRPr lang="en-US"/>
+          </a:p>
+        </p:txBody>
       </p:sp>
       <p:sp>
         <p:nvSpPr>
@@ -2852,6 +2598,13 @@
             <a:prstDash val="solid"/>
           </a:ln>
         </p:spPr>
+        <p:txBody>
+          <a:bodyPr/>
+          <a:lstStyle/>
+          <a:p>
+            <a:endParaRPr lang="en-US"/>
+          </a:p>
+        </p:txBody>
       </p:sp>
       <p:sp>
         <p:nvSpPr>
@@ -2874,7 +2627,7 @@
           <a:bodyPr wrap="square" rtlCol="0" anchor="ctr"/>
           <a:lstStyle/>
           <a:p>
-            <a:pPr algn="ctr" indent="0" marL="0">
+            <a:pPr marL="0" indent="0" algn="ctr">
               <a:buNone/>
             </a:pPr>
             <a:r>
@@ -2888,7 +2641,7 @@
             <a:endParaRPr lang="en-US" sz="1300" dirty="0"/>
           </a:p>
           <a:p>
-            <a:pPr algn="ctr" indent="0" marL="0">
+            <a:pPr marL="0" indent="0" algn="ctr">
               <a:buNone/>
             </a:pPr>
             <a:r>
@@ -2924,7 +2677,7 @@
           <a:bodyPr wrap="square" rtlCol="0" anchor="ctr"/>
           <a:lstStyle/>
           <a:p>
-            <a:pPr algn="ctr" indent="0" marL="0">
+            <a:pPr marL="0" indent="0" algn="ctr">
               <a:buNone/>
             </a:pPr>
             <a:r>
@@ -2963,13 +2716,20 @@
             <a:prstDash val="solid"/>
           </a:ln>
           <a:effectLst>
-            <a:outerShdw sx="100000" sy="100000" kx="0" ky="0" algn="bl" rotWithShape="0" blurRad="76200" dist="25400" dir="8100000">
+            <a:outerShdw blurRad="76200" dist="25400" dir="8100000" algn="bl" rotWithShape="0">
               <a:srgbClr val="000000">
                 <a:alpha val="20000"/>
               </a:srgbClr>
             </a:outerShdw>
           </a:effectLst>
         </p:spPr>
+        <p:txBody>
+          <a:bodyPr/>
+          <a:lstStyle/>
+          <a:p>
+            <a:endParaRPr lang="en-US"/>
+          </a:p>
+        </p:txBody>
       </p:sp>
       <p:sp>
         <p:nvSpPr>
@@ -2995,6 +2755,13 @@
             <a:prstDash val="solid"/>
           </a:ln>
         </p:spPr>
+        <p:txBody>
+          <a:bodyPr/>
+          <a:lstStyle/>
+          <a:p>
+            <a:endParaRPr lang="en-US"/>
+          </a:p>
+        </p:txBody>
       </p:sp>
       <p:sp>
         <p:nvSpPr>
@@ -3017,7 +2784,7 @@
           <a:bodyPr wrap="square" rtlCol="0" anchor="ctr"/>
           <a:lstStyle/>
           <a:p>
-            <a:pPr algn="ctr" indent="0" marL="0">
+            <a:pPr marL="0" indent="0" algn="ctr">
               <a:buNone/>
             </a:pPr>
             <a:r>
@@ -3031,7 +2798,7 @@
             <a:endParaRPr lang="en-US" sz="1300" dirty="0"/>
           </a:p>
           <a:p>
-            <a:pPr algn="ctr" indent="0" marL="0">
+            <a:pPr marL="0" indent="0" algn="ctr">
               <a:buNone/>
             </a:pPr>
             <a:r>
@@ -3067,7 +2834,7 @@
           <a:bodyPr wrap="square" rtlCol="0" anchor="ctr"/>
           <a:lstStyle/>
           <a:p>
-            <a:pPr algn="ctr" indent="0" marL="0">
+            <a:pPr marL="0" indent="0" algn="ctr">
               <a:buNone/>
             </a:pPr>
             <a:r>
@@ -3092,12 +2859,13 @@
 
 <file path=ppt/slides/slide4.xml><?xml version="1.0" encoding="utf-8"?>
 <p:sld xmlns:a="http://schemas.openxmlformats.org/drawingml/2006/main" xmlns:r="http://schemas.openxmlformats.org/officeDocument/2006/relationships" xmlns:p="http://schemas.openxmlformats.org/presentationml/2006/main">
-  <p:cSld name="Slide 4">
+  <p:cSld name="Slide 5">
     <p:bg>
       <p:bgPr>
         <a:solidFill>
           <a:srgbClr val="F4F6FB"/>
         </a:solidFill>
+        <a:effectLst/>
       </p:bgPr>
     </p:bg>
     <p:spTree>
@@ -3135,7 +2903,7 @@
           <a:bodyPr wrap="square" rtlCol="0" anchor="ctr"/>
           <a:lstStyle/>
           <a:p>
-            <a:pPr indent="0" marL="0">
+            <a:pPr marL="0" indent="0">
               <a:buNone/>
             </a:pPr>
             <a:r>
@@ -3147,7 +2915,7 @@
                 <a:ea typeface="Calibri" pitchFamily="34" charset="-122"/>
                 <a:cs typeface="Calibri" pitchFamily="34" charset="-120"/>
               </a:rPr>
-              <a:t>Arquitetura Técnica</a:t>
+              <a:t>O que o sistema devolve</a:t>
             </a:r>
             <a:endParaRPr lang="en-US" sz="3200" dirty="0"/>
           </a:p>
@@ -3161,8 +2929,8 @@
         </p:nvSpPr>
         <p:spPr>
           <a:xfrm>
-            <a:off x="1371600" y="1188720"/>
-            <a:ext cx="6400800" cy="822960"/>
+            <a:off x="548640" y="1005840"/>
+            <a:ext cx="8046720" cy="3566160"/>
           </a:xfrm>
           <a:prstGeom prst="rect">
             <a:avLst/>
@@ -3177,13 +2945,20 @@
             <a:prstDash val="solid"/>
           </a:ln>
           <a:effectLst>
-            <a:outerShdw sx="100000" sy="100000" kx="0" ky="0" algn="bl" rotWithShape="0" blurRad="101600" dist="25400" dir="8100000">
+            <a:outerShdw blurRad="127000" dist="38100" dir="8100000" algn="bl" rotWithShape="0">
               <a:srgbClr val="000000">
                 <a:alpha val="10000"/>
               </a:srgbClr>
             </a:outerShdw>
           </a:effectLst>
         </p:spPr>
+        <p:txBody>
+          <a:bodyPr/>
+          <a:lstStyle/>
+          <a:p>
+            <a:endParaRPr lang="en-US"/>
+          </a:p>
+        </p:txBody>
       </p:sp>
       <p:sp>
         <p:nvSpPr>
@@ -3193,173 +2968,8 @@
         </p:nvSpPr>
         <p:spPr>
           <a:xfrm>
-            <a:off x="1371600" y="1188720"/>
-            <a:ext cx="64008" cy="822960"/>
-          </a:xfrm>
-          <a:prstGeom prst="rect">
-            <a:avLst/>
-          </a:prstGeom>
-          <a:solidFill>
-            <a:srgbClr val="3498DB"/>
-          </a:solidFill>
-          <a:ln w="12700">
-            <a:solidFill>
-              <a:srgbClr val="3498DB"/>
-            </a:solidFill>
-            <a:prstDash val="solid"/>
-          </a:ln>
-        </p:spPr>
-      </p:sp>
-      <p:sp>
-        <p:nvSpPr>
-          <p:cNvPr id="5" name="Text 3"/>
-          <p:cNvSpPr/>
-          <p:nvPr/>
-        </p:nvSpPr>
-        <p:spPr>
-          <a:xfrm>
-            <a:off x="1600200" y="1234440"/>
-            <a:ext cx="3200400" cy="347472"/>
-          </a:xfrm>
-          <a:prstGeom prst="rect">
-            <a:avLst/>
-          </a:prstGeom>
-          <a:noFill/>
-          <a:ln/>
-        </p:spPr>
-        <p:txBody>
-          <a:bodyPr wrap="square" lIns="0" tIns="0" rIns="0" bIns="0" rtlCol="0" anchor="ctr"/>
-          <a:lstStyle/>
-          <a:p>
-            <a:pPr indent="0" marL="0">
-              <a:buNone/>
-            </a:pPr>
-            <a:r>
-              <a:rPr lang="en-US" sz="1500" b="1" dirty="0">
-                <a:solidFill>
-                  <a:srgbClr val="1E2761"/>
-                </a:solidFill>
-              </a:rPr>
-              <a:t>Streamlit GUI</a:t>
-            </a:r>
-            <a:endParaRPr lang="en-US" sz="1500" dirty="0"/>
-          </a:p>
-        </p:txBody>
-      </p:sp>
-      <p:sp>
-        <p:nvSpPr>
-          <p:cNvPr id="6" name="Text 4"/>
-          <p:cNvSpPr/>
-          <p:nvPr/>
-        </p:nvSpPr>
-        <p:spPr>
-          <a:xfrm>
-            <a:off x="1600200" y="1600200"/>
-            <a:ext cx="5943600" cy="292608"/>
-          </a:xfrm>
-          <a:prstGeom prst="rect">
-            <a:avLst/>
-          </a:prstGeom>
-          <a:noFill/>
-          <a:ln/>
-        </p:spPr>
-        <p:txBody>
-          <a:bodyPr wrap="square" lIns="0" tIns="0" rIns="0" bIns="0" rtlCol="0" anchor="ctr"/>
-          <a:lstStyle/>
-          <a:p>
-            <a:pPr indent="0" marL="0">
-              <a:buNone/>
-            </a:pPr>
-            <a:r>
-              <a:rPr lang="en-US" sz="1100" dirty="0">
-                <a:solidFill>
-                  <a:srgbClr val="7B8DB0"/>
-                </a:solidFill>
-              </a:rPr>
-              <a:t>Frontend — visualização e interação</a:t>
-            </a:r>
-            <a:endParaRPr lang="en-US" sz="1100" dirty="0"/>
-          </a:p>
-        </p:txBody>
-      </p:sp>
-      <p:sp>
-        <p:nvSpPr>
-          <p:cNvPr id="7" name="Text 5"/>
-          <p:cNvSpPr/>
-          <p:nvPr/>
-        </p:nvSpPr>
-        <p:spPr>
-          <a:xfrm>
-            <a:off x="4297680" y="2011680"/>
-            <a:ext cx="548640" cy="292608"/>
-          </a:xfrm>
-          <a:prstGeom prst="rect">
-            <a:avLst/>
-          </a:prstGeom>
-          <a:noFill/>
-          <a:ln/>
-        </p:spPr>
-        <p:txBody>
-          <a:bodyPr wrap="square" rtlCol="0" anchor="ctr"/>
-          <a:lstStyle/>
-          <a:p>
-            <a:pPr algn="ctr" indent="0" marL="0">
-              <a:buNone/>
-            </a:pPr>
-            <a:r>
-              <a:rPr lang="en-US" sz="1600" dirty="0">
-                <a:solidFill>
-                  <a:srgbClr val="7B8DB0"/>
-                </a:solidFill>
-              </a:rPr>
-              <a:t>↕</a:t>
-            </a:r>
-            <a:endParaRPr lang="en-US" sz="1600" dirty="0"/>
-          </a:p>
-        </p:txBody>
-      </p:sp>
-      <p:sp>
-        <p:nvSpPr>
-          <p:cNvPr id="8" name="Shape 6"/>
-          <p:cNvSpPr/>
-          <p:nvPr/>
-        </p:nvSpPr>
-        <p:spPr>
-          <a:xfrm>
-            <a:off x="1371600" y="2286000"/>
-            <a:ext cx="6400800" cy="822960"/>
-          </a:xfrm>
-          <a:prstGeom prst="rect">
-            <a:avLst/>
-          </a:prstGeom>
-          <a:solidFill>
-            <a:srgbClr val="FFFFFF"/>
-          </a:solidFill>
-          <a:ln w="12700">
-            <a:solidFill>
-              <a:srgbClr val="FFFFFF"/>
-            </a:solidFill>
-            <a:prstDash val="solid"/>
-          </a:ln>
-          <a:effectLst>
-            <a:outerShdw sx="100000" sy="100000" kx="0" ky="0" algn="bl" rotWithShape="0" blurRad="101600" dist="25400" dir="8100000">
-              <a:srgbClr val="000000">
-                <a:alpha val="10000"/>
-              </a:srgbClr>
-            </a:outerShdw>
-          </a:effectLst>
-        </p:spPr>
-      </p:sp>
-      <p:sp>
-        <p:nvSpPr>
-          <p:cNvPr id="9" name="Shape 7"/>
-          <p:cNvSpPr/>
-          <p:nvPr/>
-        </p:nvSpPr>
-        <p:spPr>
-          <a:xfrm>
-            <a:off x="1371600" y="2286000"/>
-            <a:ext cx="64008" cy="822960"/>
+            <a:off x="548640" y="1005840"/>
+            <a:ext cx="8046720" cy="73152"/>
           </a:xfrm>
           <a:prstGeom prst="rect">
             <a:avLst/>
@@ -3374,17 +2984,24 @@
             <a:prstDash val="solid"/>
           </a:ln>
         </p:spPr>
-      </p:sp>
-      <p:sp>
-        <p:nvSpPr>
-          <p:cNvPr id="10" name="Text 8"/>
-          <p:cNvSpPr/>
-          <p:nvPr/>
-        </p:nvSpPr>
-        <p:spPr>
-          <a:xfrm>
-            <a:off x="1600200" y="2331720"/>
-            <a:ext cx="3200400" cy="347472"/>
+        <p:txBody>
+          <a:bodyPr/>
+          <a:lstStyle/>
+          <a:p>
+            <a:endParaRPr lang="en-US"/>
+          </a:p>
+        </p:txBody>
+      </p:sp>
+      <p:sp>
+        <p:nvSpPr>
+          <p:cNvPr id="5" name="Text 3"/>
+          <p:cNvSpPr/>
+          <p:nvPr/>
+        </p:nvSpPr>
+        <p:spPr>
+          <a:xfrm>
+            <a:off x="777240" y="1115568"/>
+            <a:ext cx="4572000" cy="411480"/>
           </a:xfrm>
           <a:prstGeom prst="rect">
             <a:avLst/>
@@ -3393,163 +3010,282 @@
           <a:ln/>
         </p:spPr>
         <p:txBody>
+          <a:bodyPr wrap="square" rtlCol="0" anchor="ctr"/>
+          <a:lstStyle/>
+          <a:p>
+            <a:pPr marL="0" indent="0">
+              <a:buNone/>
+            </a:pPr>
+            <a:r>
+              <a:rPr lang="en-US" sz="1800" b="1" dirty="0">
+                <a:solidFill>
+                  <a:srgbClr val="1E2761"/>
+                </a:solidFill>
+              </a:rPr>
+              <a:t>Carla Nogueira</a:t>
+            </a:r>
+            <a:endParaRPr lang="en-US" sz="1800" dirty="0"/>
+          </a:p>
+        </p:txBody>
+      </p:sp>
+      <p:sp>
+        <p:nvSpPr>
+          <p:cNvPr id="6" name="Text 4"/>
+          <p:cNvSpPr/>
+          <p:nvPr/>
+        </p:nvSpPr>
+        <p:spPr>
+          <a:xfrm>
+            <a:off x="777240" y="1508760"/>
+            <a:ext cx="5486400" cy="274320"/>
+          </a:xfrm>
+          <a:prstGeom prst="rect">
+            <a:avLst/>
+          </a:prstGeom>
+          <a:noFill/>
+          <a:ln/>
+        </p:spPr>
+        <p:txBody>
+          <a:bodyPr wrap="square" rtlCol="0" anchor="ctr"/>
+          <a:lstStyle/>
+          <a:p>
+            <a:pPr marL="0" indent="0">
+              <a:buNone/>
+            </a:pPr>
+            <a:r>
+              <a:rPr lang="en-US" sz="1100" dirty="0">
+                <a:solidFill>
+                  <a:srgbClr val="7B8DB0"/>
+                </a:solidFill>
+              </a:rPr>
+              <a:t>Senior Tax Manager @ KPMG Lisboa</a:t>
+            </a:r>
+            <a:endParaRPr lang="en-US" sz="1100" dirty="0"/>
+          </a:p>
+        </p:txBody>
+      </p:sp>
+      <p:sp>
+        <p:nvSpPr>
+          <p:cNvPr id="7" name="Shape 5"/>
+          <p:cNvSpPr/>
+          <p:nvPr/>
+        </p:nvSpPr>
+        <p:spPr>
+          <a:xfrm>
+            <a:off x="6766560" y="1097280"/>
+            <a:ext cx="1463040" cy="914400"/>
+          </a:xfrm>
+          <a:prstGeom prst="roundRect">
+            <a:avLst>
+              <a:gd name="adj" fmla="val 10000"/>
+            </a:avLst>
+          </a:prstGeom>
+          <a:solidFill>
+            <a:srgbClr val="2ECC71"/>
+          </a:solidFill>
+          <a:ln/>
+          <a:effectLst>
+            <a:outerShdw blurRad="76200" dist="25400" dir="8100000" algn="bl" rotWithShape="0">
+              <a:srgbClr val="000000">
+                <a:alpha val="15000"/>
+              </a:srgbClr>
+            </a:outerShdw>
+          </a:effectLst>
+        </p:spPr>
+        <p:txBody>
+          <a:bodyPr/>
+          <a:lstStyle/>
+          <a:p>
+            <a:endParaRPr lang="en-US"/>
+          </a:p>
+        </p:txBody>
+      </p:sp>
+      <p:sp>
+        <p:nvSpPr>
+          <p:cNvPr id="8" name="Text 6"/>
+          <p:cNvSpPr/>
+          <p:nvPr/>
+        </p:nvSpPr>
+        <p:spPr>
+          <a:xfrm>
+            <a:off x="6766560" y="1097280"/>
+            <a:ext cx="1463040" cy="594360"/>
+          </a:xfrm>
+          <a:prstGeom prst="rect">
+            <a:avLst/>
+          </a:prstGeom>
+          <a:noFill/>
+          <a:ln/>
+        </p:spPr>
+        <p:txBody>
+          <a:bodyPr wrap="square" lIns="0" tIns="0" rIns="0" bIns="0" rtlCol="0" anchor="b"/>
+          <a:lstStyle/>
+          <a:p>
+            <a:pPr marL="0" indent="0" algn="ctr">
+              <a:buNone/>
+            </a:pPr>
+            <a:r>
+              <a:rPr lang="en-US" sz="3000" b="1" dirty="0">
+                <a:solidFill>
+                  <a:srgbClr val="FFFFFF"/>
+                </a:solidFill>
+              </a:rPr>
+              <a:t>8.1</a:t>
+            </a:r>
+            <a:endParaRPr lang="en-US" sz="3000" dirty="0"/>
+          </a:p>
+        </p:txBody>
+      </p:sp>
+      <p:sp>
+        <p:nvSpPr>
+          <p:cNvPr id="9" name="Text 7"/>
+          <p:cNvSpPr/>
+          <p:nvPr/>
+        </p:nvSpPr>
+        <p:spPr>
+          <a:xfrm>
+            <a:off x="6766560" y="1691640"/>
+            <a:ext cx="1463040" cy="274320"/>
+          </a:xfrm>
+          <a:prstGeom prst="rect">
+            <a:avLst/>
+          </a:prstGeom>
+          <a:noFill/>
+          <a:ln/>
+        </p:spPr>
+        <p:txBody>
           <a:bodyPr wrap="square" lIns="0" tIns="0" rIns="0" bIns="0" rtlCol="0" anchor="ctr"/>
           <a:lstStyle/>
           <a:p>
-            <a:pPr indent="0" marL="0">
-              <a:buNone/>
-            </a:pPr>
-            <a:r>
-              <a:rPr lang="en-US" sz="1500" b="1" dirty="0">
-                <a:solidFill>
-                  <a:srgbClr val="1E2761"/>
-                </a:solidFill>
-              </a:rPr>
-              <a:t>Python Library</a:t>
-            </a:r>
-            <a:endParaRPr lang="en-US" sz="1500" dirty="0"/>
-          </a:p>
-        </p:txBody>
-      </p:sp>
-      <p:sp>
-        <p:nvSpPr>
-          <p:cNvPr id="11" name="Text 9"/>
-          <p:cNvSpPr/>
-          <p:nvPr/>
-        </p:nvSpPr>
-        <p:spPr>
-          <a:xfrm>
-            <a:off x="1600200" y="2697480"/>
-            <a:ext cx="5943600" cy="292608"/>
-          </a:xfrm>
-          <a:prstGeom prst="rect">
-            <a:avLst/>
-          </a:prstGeom>
-          <a:noFill/>
-          <a:ln/>
-        </p:spPr>
-        <p:txBody>
-          <a:bodyPr wrap="square" lIns="0" tIns="0" rIns="0" bIns="0" rtlCol="0" anchor="ctr"/>
-          <a:lstStyle/>
-          <a:p>
-            <a:pPr indent="0" marL="0">
-              <a:buNone/>
-            </a:pPr>
-            <a:r>
-              <a:rPr lang="en-US" sz="1100" dirty="0">
-                <a:solidFill>
-                  <a:srgbClr val="7B8DB0"/>
-                </a:solidFill>
-              </a:rPr>
-              <a:t>Lógica de negócio, chamadas à LLM, acesso à DB</a:t>
-            </a:r>
-            <a:endParaRPr lang="en-US" sz="1100" dirty="0"/>
-          </a:p>
-        </p:txBody>
-      </p:sp>
-      <p:sp>
-        <p:nvSpPr>
-          <p:cNvPr id="12" name="Text 10"/>
-          <p:cNvSpPr/>
-          <p:nvPr/>
-        </p:nvSpPr>
-        <p:spPr>
-          <a:xfrm>
-            <a:off x="4297680" y="3108960"/>
-            <a:ext cx="548640" cy="292608"/>
-          </a:xfrm>
-          <a:prstGeom prst="rect">
-            <a:avLst/>
-          </a:prstGeom>
-          <a:noFill/>
-          <a:ln/>
-        </p:spPr>
-        <p:txBody>
-          <a:bodyPr wrap="square" rtlCol="0" anchor="ctr"/>
-          <a:lstStyle/>
-          <a:p>
-            <a:pPr algn="ctr" indent="0" marL="0">
-              <a:buNone/>
-            </a:pPr>
-            <a:r>
-              <a:rPr lang="en-US" sz="1600" dirty="0">
-                <a:solidFill>
-                  <a:srgbClr val="7B8DB0"/>
-                </a:solidFill>
-              </a:rPr>
-              <a:t>↕</a:t>
-            </a:r>
-            <a:endParaRPr lang="en-US" sz="1600" dirty="0"/>
-          </a:p>
-        </p:txBody>
-      </p:sp>
-      <p:sp>
-        <p:nvSpPr>
-          <p:cNvPr id="13" name="Shape 11"/>
-          <p:cNvSpPr/>
-          <p:nvPr/>
-        </p:nvSpPr>
-        <p:spPr>
-          <a:xfrm>
-            <a:off x="1371600" y="3383280"/>
-            <a:ext cx="6400800" cy="822960"/>
-          </a:xfrm>
-          <a:prstGeom prst="rect">
-            <a:avLst/>
-          </a:prstGeom>
-          <a:solidFill>
-            <a:srgbClr val="FFFFFF"/>
+            <a:pPr marL="0" indent="0" algn="ctr">
+              <a:buNone/>
+            </a:pPr>
+            <a:r>
+              <a:rPr lang="en-US" sz="900" dirty="0">
+                <a:solidFill>
+                  <a:srgbClr val="FFFFFF"/>
+                </a:solidFill>
+              </a:rPr>
+              <a:t>Overall</a:t>
+            </a:r>
+            <a:endParaRPr lang="en-US" sz="900" dirty="0"/>
+          </a:p>
+        </p:txBody>
+      </p:sp>
+      <p:sp>
+        <p:nvSpPr>
+          <p:cNvPr id="10" name="Shape 8"/>
+          <p:cNvSpPr/>
+          <p:nvPr/>
+        </p:nvSpPr>
+        <p:spPr>
+          <a:xfrm>
+            <a:off x="777240" y="1874520"/>
+            <a:ext cx="5760720" cy="502920"/>
+          </a:xfrm>
+          <a:prstGeom prst="rect">
+            <a:avLst/>
+          </a:prstGeom>
+          <a:solidFill>
+            <a:srgbClr val="EAF9EE"/>
           </a:solidFill>
           <a:ln w="12700">
             <a:solidFill>
-              <a:srgbClr val="FFFFFF"/>
+              <a:srgbClr val="A9DFBF"/>
             </a:solidFill>
             <a:prstDash val="solid"/>
           </a:ln>
+        </p:spPr>
+        <p:txBody>
+          <a:bodyPr/>
+          <a:lstStyle/>
+          <a:p>
+            <a:endParaRPr lang="en-US"/>
+          </a:p>
+        </p:txBody>
+      </p:sp>
+      <p:sp>
+        <p:nvSpPr>
+          <p:cNvPr id="11" name="Text 9"/>
+          <p:cNvSpPr/>
+          <p:nvPr/>
+        </p:nvSpPr>
+        <p:spPr>
+          <a:xfrm>
+            <a:off x="868680" y="1901952"/>
+            <a:ext cx="5577840" cy="457200"/>
+          </a:xfrm>
+          <a:prstGeom prst="rect">
+            <a:avLst/>
+          </a:prstGeom>
+          <a:noFill/>
+          <a:ln/>
+        </p:spPr>
+        <p:txBody>
+          <a:bodyPr wrap="square" rtlCol="0" anchor="ctr"/>
+          <a:lstStyle/>
+          <a:p>
+            <a:pPr marL="0" indent="0">
+              <a:buNone/>
+            </a:pPr>
+            <a:r>
+              <a:rPr lang="en-US" sz="1000" i="1" dirty="0">
+                <a:solidFill>
+                  <a:srgbClr val="1E8449"/>
+                </a:solidFill>
+              </a:rPr>
+              <a:t>"Excelente fit para a função. LLM em Tax Law e 7 anos em Big4 são diferenciais fortes. Sem evidência de gestão de equipa."</a:t>
+            </a:r>
+            <a:endParaRPr lang="en-US" sz="1000" dirty="0"/>
+          </a:p>
+        </p:txBody>
+      </p:sp>
+      <p:sp>
+        <p:nvSpPr>
+          <p:cNvPr id="12" name="Shape 10"/>
+          <p:cNvSpPr/>
+          <p:nvPr/>
+        </p:nvSpPr>
+        <p:spPr>
+          <a:xfrm>
+            <a:off x="777240" y="2560320"/>
+            <a:ext cx="1371600" cy="502920"/>
+          </a:xfrm>
+          <a:prstGeom prst="roundRect">
+            <a:avLst>
+              <a:gd name="adj" fmla="val 21818"/>
+            </a:avLst>
+          </a:prstGeom>
+          <a:solidFill>
+            <a:srgbClr val="2ECC71"/>
+          </a:solidFill>
+          <a:ln/>
           <a:effectLst>
-            <a:outerShdw sx="100000" sy="100000" kx="0" ky="0" algn="bl" rotWithShape="0" blurRad="101600" dist="25400" dir="8100000">
+            <a:outerShdw blurRad="76200" dist="25400" dir="8100000" algn="bl" rotWithShape="0">
               <a:srgbClr val="000000">
-                <a:alpha val="10000"/>
+                <a:alpha val="12000"/>
               </a:srgbClr>
             </a:outerShdw>
           </a:effectLst>
         </p:spPr>
-      </p:sp>
-      <p:sp>
-        <p:nvSpPr>
-          <p:cNvPr id="14" name="Shape 12"/>
-          <p:cNvSpPr/>
-          <p:nvPr/>
-        </p:nvSpPr>
-        <p:spPr>
-          <a:xfrm>
-            <a:off x="1371600" y="3383280"/>
-            <a:ext cx="64008" cy="822960"/>
-          </a:xfrm>
-          <a:prstGeom prst="rect">
-            <a:avLst/>
-          </a:prstGeom>
-          <a:solidFill>
-            <a:srgbClr val="2ECC71"/>
-          </a:solidFill>
-          <a:ln w="12700">
-            <a:solidFill>
-              <a:srgbClr val="2ECC71"/>
-            </a:solidFill>
-            <a:prstDash val="solid"/>
-          </a:ln>
-        </p:spPr>
-      </p:sp>
-      <p:sp>
-        <p:nvSpPr>
-          <p:cNvPr id="15" name="Text 13"/>
-          <p:cNvSpPr/>
-          <p:nvPr/>
-        </p:nvSpPr>
-        <p:spPr>
-          <a:xfrm>
-            <a:off x="1600200" y="3429000"/>
-            <a:ext cx="3200400" cy="347472"/>
+        <p:txBody>
+          <a:bodyPr/>
+          <a:lstStyle/>
+          <a:p>
+            <a:endParaRPr lang="en-US"/>
+          </a:p>
+        </p:txBody>
+      </p:sp>
+      <p:sp>
+        <p:nvSpPr>
+          <p:cNvPr id="13" name="Text 11"/>
+          <p:cNvSpPr/>
+          <p:nvPr/>
+        </p:nvSpPr>
+        <p:spPr>
+          <a:xfrm>
+            <a:off x="777240" y="2560320"/>
+            <a:ext cx="1371600" cy="502920"/>
           </a:xfrm>
           <a:prstGeom prst="rect">
             <a:avLst/>
@@ -3561,31 +3297,319 @@
           <a:bodyPr wrap="square" lIns="0" tIns="0" rIns="0" bIns="0" rtlCol="0" anchor="ctr"/>
           <a:lstStyle/>
           <a:p>
-            <a:pPr indent="0" marL="0">
-              <a:buNone/>
-            </a:pPr>
-            <a:r>
-              <a:rPr lang="en-US" sz="1500" b="1" dirty="0">
+            <a:pPr marL="0" indent="0" algn="ctr">
+              <a:buNone/>
+            </a:pPr>
+            <a:r>
+              <a:rPr lang="en-US" sz="1800" b="1" dirty="0">
+                <a:solidFill>
+                  <a:srgbClr val="FFFFFF"/>
+                </a:solidFill>
+              </a:rPr>
+              <a:t>8.5</a:t>
+            </a:r>
+            <a:endParaRPr lang="en-US" sz="1800" dirty="0"/>
+          </a:p>
+        </p:txBody>
+      </p:sp>
+      <p:sp>
+        <p:nvSpPr>
+          <p:cNvPr id="14" name="Text 12"/>
+          <p:cNvSpPr/>
+          <p:nvPr/>
+        </p:nvSpPr>
+        <p:spPr>
+          <a:xfrm>
+            <a:off x="685800" y="3108960"/>
+            <a:ext cx="1554480" cy="274320"/>
+          </a:xfrm>
+          <a:prstGeom prst="rect">
+            <a:avLst/>
+          </a:prstGeom>
+          <a:noFill/>
+          <a:ln/>
+        </p:spPr>
+        <p:txBody>
+          <a:bodyPr wrap="square" lIns="0" tIns="0" rIns="0" bIns="0" rtlCol="0" anchor="ctr"/>
+          <a:lstStyle/>
+          <a:p>
+            <a:pPr marL="0" indent="0" algn="ctr">
+              <a:buNone/>
+            </a:pPr>
+            <a:r>
+              <a:rPr lang="en-US" sz="900" dirty="0">
+                <a:solidFill>
+                  <a:srgbClr val="7B8DB0"/>
+                </a:solidFill>
+              </a:rPr>
+              <a:t>Domain Alignment</a:t>
+            </a:r>
+            <a:endParaRPr lang="en-US" sz="900" dirty="0"/>
+          </a:p>
+        </p:txBody>
+      </p:sp>
+      <p:sp>
+        <p:nvSpPr>
+          <p:cNvPr id="15" name="Shape 13"/>
+          <p:cNvSpPr/>
+          <p:nvPr/>
+        </p:nvSpPr>
+        <p:spPr>
+          <a:xfrm>
+            <a:off x="2377440" y="2560320"/>
+            <a:ext cx="1371600" cy="502920"/>
+          </a:xfrm>
+          <a:prstGeom prst="roundRect">
+            <a:avLst>
+              <a:gd name="adj" fmla="val 21818"/>
+            </a:avLst>
+          </a:prstGeom>
+          <a:solidFill>
+            <a:srgbClr val="F39C12"/>
+          </a:solidFill>
+          <a:ln/>
+          <a:effectLst>
+            <a:outerShdw blurRad="76200" dist="25400" dir="8100000" algn="bl" rotWithShape="0">
+              <a:srgbClr val="000000">
+                <a:alpha val="12000"/>
+              </a:srgbClr>
+            </a:outerShdw>
+          </a:effectLst>
+        </p:spPr>
+        <p:txBody>
+          <a:bodyPr/>
+          <a:lstStyle/>
+          <a:p>
+            <a:endParaRPr lang="en-US"/>
+          </a:p>
+        </p:txBody>
+      </p:sp>
+      <p:sp>
+        <p:nvSpPr>
+          <p:cNvPr id="16" name="Text 14"/>
+          <p:cNvSpPr/>
+          <p:nvPr/>
+        </p:nvSpPr>
+        <p:spPr>
+          <a:xfrm>
+            <a:off x="2377440" y="2560320"/>
+            <a:ext cx="1371600" cy="502920"/>
+          </a:xfrm>
+          <a:prstGeom prst="rect">
+            <a:avLst/>
+          </a:prstGeom>
+          <a:noFill/>
+          <a:ln/>
+        </p:spPr>
+        <p:txBody>
+          <a:bodyPr wrap="square" lIns="0" tIns="0" rIns="0" bIns="0" rtlCol="0" anchor="ctr"/>
+          <a:lstStyle/>
+          <a:p>
+            <a:pPr marL="0" indent="0" algn="ctr">
+              <a:buNone/>
+            </a:pPr>
+            <a:r>
+              <a:rPr lang="en-US" sz="1800" b="1" dirty="0">
+                <a:solidFill>
+                  <a:srgbClr val="FFFFFF"/>
+                </a:solidFill>
+              </a:rPr>
+              <a:t>8.0</a:t>
+            </a:r>
+            <a:endParaRPr lang="en-US" sz="1800" dirty="0"/>
+          </a:p>
+        </p:txBody>
+      </p:sp>
+      <p:sp>
+        <p:nvSpPr>
+          <p:cNvPr id="17" name="Text 15"/>
+          <p:cNvSpPr/>
+          <p:nvPr/>
+        </p:nvSpPr>
+        <p:spPr>
+          <a:xfrm>
+            <a:off x="2286000" y="3108960"/>
+            <a:ext cx="1554480" cy="274320"/>
+          </a:xfrm>
+          <a:prstGeom prst="rect">
+            <a:avLst/>
+          </a:prstGeom>
+          <a:noFill/>
+          <a:ln/>
+        </p:spPr>
+        <p:txBody>
+          <a:bodyPr wrap="square" lIns="0" tIns="0" rIns="0" bIns="0" rtlCol="0" anchor="ctr"/>
+          <a:lstStyle/>
+          <a:p>
+            <a:pPr marL="0" indent="0" algn="ctr">
+              <a:buNone/>
+            </a:pPr>
+            <a:r>
+              <a:rPr lang="en-US" sz="900" dirty="0">
+                <a:solidFill>
+                  <a:srgbClr val="7B8DB0"/>
+                </a:solidFill>
+              </a:rPr>
+              <a:t>Required Skills</a:t>
+            </a:r>
+            <a:endParaRPr lang="en-US" sz="900" dirty="0"/>
+          </a:p>
+        </p:txBody>
+      </p:sp>
+      <p:sp>
+        <p:nvSpPr>
+          <p:cNvPr id="18" name="Shape 16"/>
+          <p:cNvSpPr/>
+          <p:nvPr/>
+        </p:nvSpPr>
+        <p:spPr>
+          <a:xfrm>
+            <a:off x="3977640" y="2560320"/>
+            <a:ext cx="1371600" cy="502920"/>
+          </a:xfrm>
+          <a:prstGeom prst="roundRect">
+            <a:avLst>
+              <a:gd name="adj" fmla="val 21818"/>
+            </a:avLst>
+          </a:prstGeom>
+          <a:solidFill>
+            <a:srgbClr val="3498DB"/>
+          </a:solidFill>
+          <a:ln/>
+          <a:effectLst>
+            <a:outerShdw blurRad="76200" dist="25400" dir="8100000" algn="bl" rotWithShape="0">
+              <a:srgbClr val="000000">
+                <a:alpha val="12000"/>
+              </a:srgbClr>
+            </a:outerShdw>
+          </a:effectLst>
+        </p:spPr>
+        <p:txBody>
+          <a:bodyPr/>
+          <a:lstStyle/>
+          <a:p>
+            <a:endParaRPr lang="en-US"/>
+          </a:p>
+        </p:txBody>
+      </p:sp>
+      <p:sp>
+        <p:nvSpPr>
+          <p:cNvPr id="19" name="Text 17"/>
+          <p:cNvSpPr/>
+          <p:nvPr/>
+        </p:nvSpPr>
+        <p:spPr>
+          <a:xfrm>
+            <a:off x="3977640" y="2560320"/>
+            <a:ext cx="1371600" cy="502920"/>
+          </a:xfrm>
+          <a:prstGeom prst="rect">
+            <a:avLst/>
+          </a:prstGeom>
+          <a:noFill/>
+          <a:ln/>
+        </p:spPr>
+        <p:txBody>
+          <a:bodyPr wrap="square" lIns="0" tIns="0" rIns="0" bIns="0" rtlCol="0" anchor="ctr"/>
+          <a:lstStyle/>
+          <a:p>
+            <a:pPr marL="0" indent="0" algn="ctr">
+              <a:buNone/>
+            </a:pPr>
+            <a:r>
+              <a:rPr lang="en-US" sz="1800" b="1" dirty="0">
+                <a:solidFill>
+                  <a:srgbClr val="FFFFFF"/>
+                </a:solidFill>
+              </a:rPr>
+              <a:t>7.5</a:t>
+            </a:r>
+            <a:endParaRPr lang="en-US" sz="1800" dirty="0"/>
+          </a:p>
+        </p:txBody>
+      </p:sp>
+      <p:sp>
+        <p:nvSpPr>
+          <p:cNvPr id="20" name="Text 18"/>
+          <p:cNvSpPr/>
+          <p:nvPr/>
+        </p:nvSpPr>
+        <p:spPr>
+          <a:xfrm>
+            <a:off x="3886200" y="3108960"/>
+            <a:ext cx="1554480" cy="274320"/>
+          </a:xfrm>
+          <a:prstGeom prst="rect">
+            <a:avLst/>
+          </a:prstGeom>
+          <a:noFill/>
+          <a:ln/>
+        </p:spPr>
+        <p:txBody>
+          <a:bodyPr wrap="square" lIns="0" tIns="0" rIns="0" bIns="0" rtlCol="0" anchor="ctr"/>
+          <a:lstStyle/>
+          <a:p>
+            <a:pPr marL="0" indent="0" algn="ctr">
+              <a:buNone/>
+            </a:pPr>
+            <a:r>
+              <a:rPr lang="en-US" sz="900" dirty="0">
+                <a:solidFill>
+                  <a:srgbClr val="7B8DB0"/>
+                </a:solidFill>
+              </a:rPr>
+              <a:t>Relevant Exp.</a:t>
+            </a:r>
+            <a:endParaRPr lang="en-US" sz="900" dirty="0"/>
+          </a:p>
+        </p:txBody>
+      </p:sp>
+      <p:sp>
+        <p:nvSpPr>
+          <p:cNvPr id="21" name="Text 19"/>
+          <p:cNvSpPr/>
+          <p:nvPr/>
+        </p:nvSpPr>
+        <p:spPr>
+          <a:xfrm>
+            <a:off x="777240" y="3337560"/>
+            <a:ext cx="1828800" cy="274320"/>
+          </a:xfrm>
+          <a:prstGeom prst="rect">
+            <a:avLst/>
+          </a:prstGeom>
+          <a:noFill/>
+          <a:ln/>
+        </p:spPr>
+        <p:txBody>
+          <a:bodyPr wrap="square" rtlCol="0" anchor="ctr"/>
+          <a:lstStyle/>
+          <a:p>
+            <a:pPr marL="0" indent="0">
+              <a:buNone/>
+            </a:pPr>
+            <a:r>
+              <a:rPr lang="en-US" sz="1100" b="1" dirty="0">
                 <a:solidFill>
                   <a:srgbClr val="1E2761"/>
                 </a:solidFill>
               </a:rPr>
-              <a:t>SQLite (.db files)</a:t>
-            </a:r>
-            <a:endParaRPr lang="en-US" sz="1500" dirty="0"/>
-          </a:p>
-        </p:txBody>
-      </p:sp>
-      <p:sp>
-        <p:nvSpPr>
-          <p:cNvPr id="16" name="Text 14"/>
-          <p:cNvSpPr/>
-          <p:nvPr/>
-        </p:nvSpPr>
-        <p:spPr>
-          <a:xfrm>
-            <a:off x="1600200" y="3794760"/>
-            <a:ext cx="5943600" cy="292608"/>
+              <a:t>⚠️  Key Gaps:</a:t>
+            </a:r>
+            <a:endParaRPr lang="en-US" sz="1100" dirty="0"/>
+          </a:p>
+        </p:txBody>
+      </p:sp>
+      <p:sp>
+        <p:nvSpPr>
+          <p:cNvPr id="22" name="Text 20"/>
+          <p:cNvSpPr/>
+          <p:nvPr/>
+        </p:nvSpPr>
+        <p:spPr>
+          <a:xfrm>
+            <a:off x="777240" y="3611880"/>
+            <a:ext cx="7132320" cy="274320"/>
           </a:xfrm>
           <a:prstGeom prst="rect">
             <a:avLst/>
@@ -3594,80 +3618,19 @@
           <a:ln/>
         </p:spPr>
         <p:txBody>
-          <a:bodyPr wrap="square" lIns="0" tIns="0" rIns="0" bIns="0" rtlCol="0" anchor="ctr"/>
-          <a:lstStyle/>
-          <a:p>
-            <a:pPr indent="0" marL="0">
+          <a:bodyPr wrap="square" rtlCol="0" anchor="ctr"/>
+          <a:lstStyle/>
+          <a:p>
+            <a:pPr marL="0" indent="0">
               <a:buNone/>
             </a:pPr>
             <a:r>
               <a:rPr lang="en-US" sz="1100" dirty="0">
                 <a:solidFill>
-                  <a:srgbClr val="7B8DB0"/>
-                </a:solidFill>
-              </a:rPr>
-              <a:t>jd.db + 1.db, 2.db … — um ficheiro por Job Description</a:t>
-            </a:r>
-            <a:endParaRPr lang="en-US" sz="1100" dirty="0"/>
-          </a:p>
-        </p:txBody>
-      </p:sp>
-      <p:sp>
-        <p:nvSpPr>
-          <p:cNvPr id="17" name="Shape 15"/>
-          <p:cNvSpPr/>
-          <p:nvPr/>
-        </p:nvSpPr>
-        <p:spPr>
-          <a:xfrm>
-            <a:off x="548640" y="4206240"/>
-            <a:ext cx="8046720" cy="594360"/>
-          </a:xfrm>
-          <a:prstGeom prst="rect">
-            <a:avLst/>
-          </a:prstGeom>
-          <a:solidFill>
-            <a:srgbClr val="EBF5FB"/>
-          </a:solidFill>
-          <a:ln w="12700">
-            <a:solidFill>
-              <a:srgbClr val="AED6F1"/>
-            </a:solidFill>
-            <a:prstDash val="solid"/>
-          </a:ln>
-        </p:spPr>
-      </p:sp>
-      <p:sp>
-        <p:nvSpPr>
-          <p:cNvPr id="18" name="Text 16"/>
-          <p:cNvSpPr/>
-          <p:nvPr/>
-        </p:nvSpPr>
-        <p:spPr>
-          <a:xfrm>
-            <a:off x="685800" y="4251960"/>
-            <a:ext cx="7772400" cy="502920"/>
-          </a:xfrm>
-          <a:prstGeom prst="rect">
-            <a:avLst/>
-          </a:prstGeom>
-          <a:noFill/>
-          <a:ln/>
-        </p:spPr>
-        <p:txBody>
-          <a:bodyPr wrap="square" rtlCol="0" anchor="ctr"/>
-          <a:lstStyle/>
-          <a:p>
-            <a:pPr indent="0" marL="0">
-              <a:buNone/>
-            </a:pPr>
-            <a:r>
-              <a:rPr lang="en-US" sz="1100" dirty="0">
-                <a:solidFill>
-                  <a:srgbClr val="1E2761"/>
-                </a:solidFill>
-              </a:rPr>
-              <a:t>💡  Tudo corre localmente — sem cloud, sem servidor externo. Os ficheiros .db ficam numa diretoria local configurável.</a:t>
+                  <a:srgbClr val="C0392B"/>
+                </a:solidFill>
+              </a:rPr>
+              <a:t>Sem evidência de liderança de equipa  ·  Experiência em reestruturações limitada</a:t>
             </a:r>
             <a:endParaRPr lang="en-US" sz="1100" dirty="0"/>
           </a:p>
@@ -3683,12 +3646,13 @@
 
 <file path=ppt/slides/slide5.xml><?xml version="1.0" encoding="utf-8"?>
 <p:sld xmlns:a="http://schemas.openxmlformats.org/drawingml/2006/main" xmlns:r="http://schemas.openxmlformats.org/officeDocument/2006/relationships" xmlns:p="http://schemas.openxmlformats.org/presentationml/2006/main">
-  <p:cSld name="Slide 5">
+  <p:cSld name="Slide 6">
     <p:bg>
       <p:bgPr>
         <a:solidFill>
-          <a:srgbClr val="F4F6FB"/>
+          <a:srgbClr val="1E2761"/>
         </a:solidFill>
+        <a:effectLst/>
       </p:bgPr>
     </p:bg>
     <p:spTree>
@@ -3707,743 +3671,6 @@
       </p:grpSpPr>
       <p:sp>
         <p:nvSpPr>
-          <p:cNvPr id="2" name="Text 0"/>
-          <p:cNvSpPr/>
-          <p:nvPr/>
-        </p:nvSpPr>
-        <p:spPr>
-          <a:xfrm>
-            <a:off x="548640" y="320040"/>
-            <a:ext cx="7772400" cy="640080"/>
-          </a:xfrm>
-          <a:prstGeom prst="rect">
-            <a:avLst/>
-          </a:prstGeom>
-          <a:noFill/>
-          <a:ln/>
-        </p:spPr>
-        <p:txBody>
-          <a:bodyPr wrap="square" rtlCol="0" anchor="ctr"/>
-          <a:lstStyle/>
-          <a:p>
-            <a:pPr indent="0" marL="0">
-              <a:buNone/>
-            </a:pPr>
-            <a:r>
-              <a:rPr lang="en-US" sz="3200" b="1" dirty="0">
-                <a:solidFill>
-                  <a:srgbClr val="1E2761"/>
-                </a:solidFill>
-                <a:latin typeface="Calibri" pitchFamily="34" charset="0"/>
-                <a:ea typeface="Calibri" pitchFamily="34" charset="-122"/>
-                <a:cs typeface="Calibri" pitchFamily="34" charset="-120"/>
-              </a:rPr>
-              <a:t>O que o sistema devolve</a:t>
-            </a:r>
-            <a:endParaRPr lang="en-US" sz="3200" dirty="0"/>
-          </a:p>
-        </p:txBody>
-      </p:sp>
-      <p:sp>
-        <p:nvSpPr>
-          <p:cNvPr id="3" name="Shape 1"/>
-          <p:cNvSpPr/>
-          <p:nvPr/>
-        </p:nvSpPr>
-        <p:spPr>
-          <a:xfrm>
-            <a:off x="548640" y="1005840"/>
-            <a:ext cx="8046720" cy="3566160"/>
-          </a:xfrm>
-          <a:prstGeom prst="rect">
-            <a:avLst/>
-          </a:prstGeom>
-          <a:solidFill>
-            <a:srgbClr val="FFFFFF"/>
-          </a:solidFill>
-          <a:ln w="12700">
-            <a:solidFill>
-              <a:srgbClr val="FFFFFF"/>
-            </a:solidFill>
-            <a:prstDash val="solid"/>
-          </a:ln>
-          <a:effectLst>
-            <a:outerShdw sx="100000" sy="100000" kx="0" ky="0" algn="bl" rotWithShape="0" blurRad="127000" dist="38100" dir="8100000">
-              <a:srgbClr val="000000">
-                <a:alpha val="10000"/>
-              </a:srgbClr>
-            </a:outerShdw>
-          </a:effectLst>
-        </p:spPr>
-      </p:sp>
-      <p:sp>
-        <p:nvSpPr>
-          <p:cNvPr id="4" name="Shape 2"/>
-          <p:cNvSpPr/>
-          <p:nvPr/>
-        </p:nvSpPr>
-        <p:spPr>
-          <a:xfrm>
-            <a:off x="548640" y="1005840"/>
-            <a:ext cx="8046720" cy="73152"/>
-          </a:xfrm>
-          <a:prstGeom prst="rect">
-            <a:avLst/>
-          </a:prstGeom>
-          <a:solidFill>
-            <a:srgbClr val="1E2761"/>
-          </a:solidFill>
-          <a:ln w="12700">
-            <a:solidFill>
-              <a:srgbClr val="1E2761"/>
-            </a:solidFill>
-            <a:prstDash val="solid"/>
-          </a:ln>
-        </p:spPr>
-      </p:sp>
-      <p:sp>
-        <p:nvSpPr>
-          <p:cNvPr id="5" name="Text 3"/>
-          <p:cNvSpPr/>
-          <p:nvPr/>
-        </p:nvSpPr>
-        <p:spPr>
-          <a:xfrm>
-            <a:off x="777240" y="1115568"/>
-            <a:ext cx="4572000" cy="411480"/>
-          </a:xfrm>
-          <a:prstGeom prst="rect">
-            <a:avLst/>
-          </a:prstGeom>
-          <a:noFill/>
-          <a:ln/>
-        </p:spPr>
-        <p:txBody>
-          <a:bodyPr wrap="square" rtlCol="0" anchor="ctr"/>
-          <a:lstStyle/>
-          <a:p>
-            <a:pPr indent="0" marL="0">
-              <a:buNone/>
-            </a:pPr>
-            <a:r>
-              <a:rPr lang="en-US" sz="1800" b="1" dirty="0">
-                <a:solidFill>
-                  <a:srgbClr val="1E2761"/>
-                </a:solidFill>
-              </a:rPr>
-              <a:t>Carla Nogueira</a:t>
-            </a:r>
-            <a:endParaRPr lang="en-US" sz="1800" dirty="0"/>
-          </a:p>
-        </p:txBody>
-      </p:sp>
-      <p:sp>
-        <p:nvSpPr>
-          <p:cNvPr id="6" name="Text 4"/>
-          <p:cNvSpPr/>
-          <p:nvPr/>
-        </p:nvSpPr>
-        <p:spPr>
-          <a:xfrm>
-            <a:off x="777240" y="1508760"/>
-            <a:ext cx="5486400" cy="274320"/>
-          </a:xfrm>
-          <a:prstGeom prst="rect">
-            <a:avLst/>
-          </a:prstGeom>
-          <a:noFill/>
-          <a:ln/>
-        </p:spPr>
-        <p:txBody>
-          <a:bodyPr wrap="square" rtlCol="0" anchor="ctr"/>
-          <a:lstStyle/>
-          <a:p>
-            <a:pPr indent="0" marL="0">
-              <a:buNone/>
-            </a:pPr>
-            <a:r>
-              <a:rPr lang="en-US" sz="1100" dirty="0">
-                <a:solidFill>
-                  <a:srgbClr val="7B8DB0"/>
-                </a:solidFill>
-              </a:rPr>
-              <a:t>Senior Tax Manager @ KPMG Lisboa</a:t>
-            </a:r>
-            <a:endParaRPr lang="en-US" sz="1100" dirty="0"/>
-          </a:p>
-        </p:txBody>
-      </p:sp>
-      <p:sp>
-        <p:nvSpPr>
-          <p:cNvPr id="7" name="Shape 5"/>
-          <p:cNvSpPr/>
-          <p:nvPr/>
-        </p:nvSpPr>
-        <p:spPr>
-          <a:xfrm>
-            <a:off x="6766560" y="1097280"/>
-            <a:ext cx="1463040" cy="914400"/>
-          </a:xfrm>
-          <a:prstGeom prst="roundRect">
-            <a:avLst>
-              <a:gd name="adj" fmla="val 10000"/>
-            </a:avLst>
-          </a:prstGeom>
-          <a:solidFill>
-            <a:srgbClr val="2ECC71"/>
-          </a:solidFill>
-          <a:ln/>
-          <a:effectLst>
-            <a:outerShdw sx="100000" sy="100000" kx="0" ky="0" algn="bl" rotWithShape="0" blurRad="76200" dist="25400" dir="8100000">
-              <a:srgbClr val="000000">
-                <a:alpha val="15000"/>
-              </a:srgbClr>
-            </a:outerShdw>
-          </a:effectLst>
-        </p:spPr>
-      </p:sp>
-      <p:sp>
-        <p:nvSpPr>
-          <p:cNvPr id="8" name="Text 6"/>
-          <p:cNvSpPr/>
-          <p:nvPr/>
-        </p:nvSpPr>
-        <p:spPr>
-          <a:xfrm>
-            <a:off x="6766560" y="1097280"/>
-            <a:ext cx="1463040" cy="594360"/>
-          </a:xfrm>
-          <a:prstGeom prst="rect">
-            <a:avLst/>
-          </a:prstGeom>
-          <a:noFill/>
-          <a:ln/>
-        </p:spPr>
-        <p:txBody>
-          <a:bodyPr wrap="square" lIns="0" tIns="0" rIns="0" bIns="0" rtlCol="0" anchor="b"/>
-          <a:lstStyle/>
-          <a:p>
-            <a:pPr algn="ctr" indent="0" marL="0">
-              <a:buNone/>
-            </a:pPr>
-            <a:r>
-              <a:rPr lang="en-US" sz="3000" b="1" dirty="0">
-                <a:solidFill>
-                  <a:srgbClr val="FFFFFF"/>
-                </a:solidFill>
-              </a:rPr>
-              <a:t>8.1</a:t>
-            </a:r>
-            <a:endParaRPr lang="en-US" sz="3000" dirty="0"/>
-          </a:p>
-        </p:txBody>
-      </p:sp>
-      <p:sp>
-        <p:nvSpPr>
-          <p:cNvPr id="9" name="Text 7"/>
-          <p:cNvSpPr/>
-          <p:nvPr/>
-        </p:nvSpPr>
-        <p:spPr>
-          <a:xfrm>
-            <a:off x="6766560" y="1691640"/>
-            <a:ext cx="1463040" cy="274320"/>
-          </a:xfrm>
-          <a:prstGeom prst="rect">
-            <a:avLst/>
-          </a:prstGeom>
-          <a:noFill/>
-          <a:ln/>
-        </p:spPr>
-        <p:txBody>
-          <a:bodyPr wrap="square" lIns="0" tIns="0" rIns="0" bIns="0" rtlCol="0" anchor="ctr"/>
-          <a:lstStyle/>
-          <a:p>
-            <a:pPr algn="ctr" indent="0" marL="0">
-              <a:buNone/>
-            </a:pPr>
-            <a:r>
-              <a:rPr lang="en-US" sz="900" dirty="0">
-                <a:solidFill>
-                  <a:srgbClr val="FFFFFF"/>
-                </a:solidFill>
-              </a:rPr>
-              <a:t>Overall</a:t>
-            </a:r>
-            <a:endParaRPr lang="en-US" sz="900" dirty="0"/>
-          </a:p>
-        </p:txBody>
-      </p:sp>
-      <p:sp>
-        <p:nvSpPr>
-          <p:cNvPr id="10" name="Shape 8"/>
-          <p:cNvSpPr/>
-          <p:nvPr/>
-        </p:nvSpPr>
-        <p:spPr>
-          <a:xfrm>
-            <a:off x="777240" y="1874520"/>
-            <a:ext cx="5760720" cy="502920"/>
-          </a:xfrm>
-          <a:prstGeom prst="rect">
-            <a:avLst/>
-          </a:prstGeom>
-          <a:solidFill>
-            <a:srgbClr val="EAF9EE"/>
-          </a:solidFill>
-          <a:ln w="12700">
-            <a:solidFill>
-              <a:srgbClr val="A9DFBF"/>
-            </a:solidFill>
-            <a:prstDash val="solid"/>
-          </a:ln>
-        </p:spPr>
-      </p:sp>
-      <p:sp>
-        <p:nvSpPr>
-          <p:cNvPr id="11" name="Text 9"/>
-          <p:cNvSpPr/>
-          <p:nvPr/>
-        </p:nvSpPr>
-        <p:spPr>
-          <a:xfrm>
-            <a:off x="868680" y="1901952"/>
-            <a:ext cx="5577840" cy="457200"/>
-          </a:xfrm>
-          <a:prstGeom prst="rect">
-            <a:avLst/>
-          </a:prstGeom>
-          <a:noFill/>
-          <a:ln/>
-        </p:spPr>
-        <p:txBody>
-          <a:bodyPr wrap="square" rtlCol="0" anchor="ctr"/>
-          <a:lstStyle/>
-          <a:p>
-            <a:pPr indent="0" marL="0">
-              <a:buNone/>
-            </a:pPr>
-            <a:r>
-              <a:rPr lang="en-US" sz="1000" i="1" dirty="0">
-                <a:solidFill>
-                  <a:srgbClr val="1E8449"/>
-                </a:solidFill>
-              </a:rPr>
-              <a:t>"Excelente fit para a função. LLM em Tax Law e 7 anos em Big4 são diferenciais fortes. Sem evidência de gestão de equipa."</a:t>
-            </a:r>
-            <a:endParaRPr lang="en-US" sz="1000" dirty="0"/>
-          </a:p>
-        </p:txBody>
-      </p:sp>
-      <p:sp>
-        <p:nvSpPr>
-          <p:cNvPr id="12" name="Shape 10"/>
-          <p:cNvSpPr/>
-          <p:nvPr/>
-        </p:nvSpPr>
-        <p:spPr>
-          <a:xfrm>
-            <a:off x="777240" y="2560320"/>
-            <a:ext cx="1371600" cy="502920"/>
-          </a:xfrm>
-          <a:prstGeom prst="roundRect">
-            <a:avLst>
-              <a:gd name="adj" fmla="val 21818"/>
-            </a:avLst>
-          </a:prstGeom>
-          <a:solidFill>
-            <a:srgbClr val="2ECC71"/>
-          </a:solidFill>
-          <a:ln/>
-          <a:effectLst>
-            <a:outerShdw sx="100000" sy="100000" kx="0" ky="0" algn="bl" rotWithShape="0" blurRad="76200" dist="25400" dir="8100000">
-              <a:srgbClr val="000000">
-                <a:alpha val="12000"/>
-              </a:srgbClr>
-            </a:outerShdw>
-          </a:effectLst>
-        </p:spPr>
-      </p:sp>
-      <p:sp>
-        <p:nvSpPr>
-          <p:cNvPr id="13" name="Text 11"/>
-          <p:cNvSpPr/>
-          <p:nvPr/>
-        </p:nvSpPr>
-        <p:spPr>
-          <a:xfrm>
-            <a:off x="777240" y="2560320"/>
-            <a:ext cx="1371600" cy="502920"/>
-          </a:xfrm>
-          <a:prstGeom prst="rect">
-            <a:avLst/>
-          </a:prstGeom>
-          <a:noFill/>
-          <a:ln/>
-        </p:spPr>
-        <p:txBody>
-          <a:bodyPr wrap="square" lIns="0" tIns="0" rIns="0" bIns="0" rtlCol="0" anchor="ctr"/>
-          <a:lstStyle/>
-          <a:p>
-            <a:pPr algn="ctr" indent="0" marL="0">
-              <a:buNone/>
-            </a:pPr>
-            <a:r>
-              <a:rPr lang="en-US" sz="1800" b="1" dirty="0">
-                <a:solidFill>
-                  <a:srgbClr val="FFFFFF"/>
-                </a:solidFill>
-              </a:rPr>
-              <a:t>8.5</a:t>
-            </a:r>
-            <a:endParaRPr lang="en-US" sz="1800" dirty="0"/>
-          </a:p>
-        </p:txBody>
-      </p:sp>
-      <p:sp>
-        <p:nvSpPr>
-          <p:cNvPr id="14" name="Text 12"/>
-          <p:cNvSpPr/>
-          <p:nvPr/>
-        </p:nvSpPr>
-        <p:spPr>
-          <a:xfrm>
-            <a:off x="685800" y="3108960"/>
-            <a:ext cx="1554480" cy="274320"/>
-          </a:xfrm>
-          <a:prstGeom prst="rect">
-            <a:avLst/>
-          </a:prstGeom>
-          <a:noFill/>
-          <a:ln/>
-        </p:spPr>
-        <p:txBody>
-          <a:bodyPr wrap="square" lIns="0" tIns="0" rIns="0" bIns="0" rtlCol="0" anchor="ctr"/>
-          <a:lstStyle/>
-          <a:p>
-            <a:pPr algn="ctr" indent="0" marL="0">
-              <a:buNone/>
-            </a:pPr>
-            <a:r>
-              <a:rPr lang="en-US" sz="900" dirty="0">
-                <a:solidFill>
-                  <a:srgbClr val="7B8DB0"/>
-                </a:solidFill>
-              </a:rPr>
-              <a:t>Domain Alignment</a:t>
-            </a:r>
-            <a:endParaRPr lang="en-US" sz="900" dirty="0"/>
-          </a:p>
-        </p:txBody>
-      </p:sp>
-      <p:sp>
-        <p:nvSpPr>
-          <p:cNvPr id="15" name="Shape 13"/>
-          <p:cNvSpPr/>
-          <p:nvPr/>
-        </p:nvSpPr>
-        <p:spPr>
-          <a:xfrm>
-            <a:off x="2377440" y="2560320"/>
-            <a:ext cx="1371600" cy="502920"/>
-          </a:xfrm>
-          <a:prstGeom prst="roundRect">
-            <a:avLst>
-              <a:gd name="adj" fmla="val 21818"/>
-            </a:avLst>
-          </a:prstGeom>
-          <a:solidFill>
-            <a:srgbClr val="F39C12"/>
-          </a:solidFill>
-          <a:ln/>
-          <a:effectLst>
-            <a:outerShdw sx="100000" sy="100000" kx="0" ky="0" algn="bl" rotWithShape="0" blurRad="76200" dist="25400" dir="8100000">
-              <a:srgbClr val="000000">
-                <a:alpha val="12000"/>
-              </a:srgbClr>
-            </a:outerShdw>
-          </a:effectLst>
-        </p:spPr>
-      </p:sp>
-      <p:sp>
-        <p:nvSpPr>
-          <p:cNvPr id="16" name="Text 14"/>
-          <p:cNvSpPr/>
-          <p:nvPr/>
-        </p:nvSpPr>
-        <p:spPr>
-          <a:xfrm>
-            <a:off x="2377440" y="2560320"/>
-            <a:ext cx="1371600" cy="502920"/>
-          </a:xfrm>
-          <a:prstGeom prst="rect">
-            <a:avLst/>
-          </a:prstGeom>
-          <a:noFill/>
-          <a:ln/>
-        </p:spPr>
-        <p:txBody>
-          <a:bodyPr wrap="square" lIns="0" tIns="0" rIns="0" bIns="0" rtlCol="0" anchor="ctr"/>
-          <a:lstStyle/>
-          <a:p>
-            <a:pPr algn="ctr" indent="0" marL="0">
-              <a:buNone/>
-            </a:pPr>
-            <a:r>
-              <a:rPr lang="en-US" sz="1800" b="1" dirty="0">
-                <a:solidFill>
-                  <a:srgbClr val="FFFFFF"/>
-                </a:solidFill>
-              </a:rPr>
-              <a:t>8.0</a:t>
-            </a:r>
-            <a:endParaRPr lang="en-US" sz="1800" dirty="0"/>
-          </a:p>
-        </p:txBody>
-      </p:sp>
-      <p:sp>
-        <p:nvSpPr>
-          <p:cNvPr id="17" name="Text 15"/>
-          <p:cNvSpPr/>
-          <p:nvPr/>
-        </p:nvSpPr>
-        <p:spPr>
-          <a:xfrm>
-            <a:off x="2286000" y="3108960"/>
-            <a:ext cx="1554480" cy="274320"/>
-          </a:xfrm>
-          <a:prstGeom prst="rect">
-            <a:avLst/>
-          </a:prstGeom>
-          <a:noFill/>
-          <a:ln/>
-        </p:spPr>
-        <p:txBody>
-          <a:bodyPr wrap="square" lIns="0" tIns="0" rIns="0" bIns="0" rtlCol="0" anchor="ctr"/>
-          <a:lstStyle/>
-          <a:p>
-            <a:pPr algn="ctr" indent="0" marL="0">
-              <a:buNone/>
-            </a:pPr>
-            <a:r>
-              <a:rPr lang="en-US" sz="900" dirty="0">
-                <a:solidFill>
-                  <a:srgbClr val="7B8DB0"/>
-                </a:solidFill>
-              </a:rPr>
-              <a:t>Required Skills</a:t>
-            </a:r>
-            <a:endParaRPr lang="en-US" sz="900" dirty="0"/>
-          </a:p>
-        </p:txBody>
-      </p:sp>
-      <p:sp>
-        <p:nvSpPr>
-          <p:cNvPr id="18" name="Shape 16"/>
-          <p:cNvSpPr/>
-          <p:nvPr/>
-        </p:nvSpPr>
-        <p:spPr>
-          <a:xfrm>
-            <a:off x="3977640" y="2560320"/>
-            <a:ext cx="1371600" cy="502920"/>
-          </a:xfrm>
-          <a:prstGeom prst="roundRect">
-            <a:avLst>
-              <a:gd name="adj" fmla="val 21818"/>
-            </a:avLst>
-          </a:prstGeom>
-          <a:solidFill>
-            <a:srgbClr val="3498DB"/>
-          </a:solidFill>
-          <a:ln/>
-          <a:effectLst>
-            <a:outerShdw sx="100000" sy="100000" kx="0" ky="0" algn="bl" rotWithShape="0" blurRad="76200" dist="25400" dir="8100000">
-              <a:srgbClr val="000000">
-                <a:alpha val="12000"/>
-              </a:srgbClr>
-            </a:outerShdw>
-          </a:effectLst>
-        </p:spPr>
-      </p:sp>
-      <p:sp>
-        <p:nvSpPr>
-          <p:cNvPr id="19" name="Text 17"/>
-          <p:cNvSpPr/>
-          <p:nvPr/>
-        </p:nvSpPr>
-        <p:spPr>
-          <a:xfrm>
-            <a:off x="3977640" y="2560320"/>
-            <a:ext cx="1371600" cy="502920"/>
-          </a:xfrm>
-          <a:prstGeom prst="rect">
-            <a:avLst/>
-          </a:prstGeom>
-          <a:noFill/>
-          <a:ln/>
-        </p:spPr>
-        <p:txBody>
-          <a:bodyPr wrap="square" lIns="0" tIns="0" rIns="0" bIns="0" rtlCol="0" anchor="ctr"/>
-          <a:lstStyle/>
-          <a:p>
-            <a:pPr algn="ctr" indent="0" marL="0">
-              <a:buNone/>
-            </a:pPr>
-            <a:r>
-              <a:rPr lang="en-US" sz="1800" b="1" dirty="0">
-                <a:solidFill>
-                  <a:srgbClr val="FFFFFF"/>
-                </a:solidFill>
-              </a:rPr>
-              <a:t>7.5</a:t>
-            </a:r>
-            <a:endParaRPr lang="en-US" sz="1800" dirty="0"/>
-          </a:p>
-        </p:txBody>
-      </p:sp>
-      <p:sp>
-        <p:nvSpPr>
-          <p:cNvPr id="20" name="Text 18"/>
-          <p:cNvSpPr/>
-          <p:nvPr/>
-        </p:nvSpPr>
-        <p:spPr>
-          <a:xfrm>
-            <a:off x="3886200" y="3108960"/>
-            <a:ext cx="1554480" cy="274320"/>
-          </a:xfrm>
-          <a:prstGeom prst="rect">
-            <a:avLst/>
-          </a:prstGeom>
-          <a:noFill/>
-          <a:ln/>
-        </p:spPr>
-        <p:txBody>
-          <a:bodyPr wrap="square" lIns="0" tIns="0" rIns="0" bIns="0" rtlCol="0" anchor="ctr"/>
-          <a:lstStyle/>
-          <a:p>
-            <a:pPr algn="ctr" indent="0" marL="0">
-              <a:buNone/>
-            </a:pPr>
-            <a:r>
-              <a:rPr lang="en-US" sz="900" dirty="0">
-                <a:solidFill>
-                  <a:srgbClr val="7B8DB0"/>
-                </a:solidFill>
-              </a:rPr>
-              <a:t>Relevant Exp.</a:t>
-            </a:r>
-            <a:endParaRPr lang="en-US" sz="900" dirty="0"/>
-          </a:p>
-        </p:txBody>
-      </p:sp>
-      <p:sp>
-        <p:nvSpPr>
-          <p:cNvPr id="21" name="Text 19"/>
-          <p:cNvSpPr/>
-          <p:nvPr/>
-        </p:nvSpPr>
-        <p:spPr>
-          <a:xfrm>
-            <a:off x="777240" y="3337560"/>
-            <a:ext cx="1828800" cy="274320"/>
-          </a:xfrm>
-          <a:prstGeom prst="rect">
-            <a:avLst/>
-          </a:prstGeom>
-          <a:noFill/>
-          <a:ln/>
-        </p:spPr>
-        <p:txBody>
-          <a:bodyPr wrap="square" rtlCol="0" anchor="ctr"/>
-          <a:lstStyle/>
-          <a:p>
-            <a:pPr indent="0" marL="0">
-              <a:buNone/>
-            </a:pPr>
-            <a:r>
-              <a:rPr lang="en-US" sz="1100" b="1" dirty="0">
-                <a:solidFill>
-                  <a:srgbClr val="1E2761"/>
-                </a:solidFill>
-              </a:rPr>
-              <a:t>⚠️  Key Gaps:</a:t>
-            </a:r>
-            <a:endParaRPr lang="en-US" sz="1100" dirty="0"/>
-          </a:p>
-        </p:txBody>
-      </p:sp>
-      <p:sp>
-        <p:nvSpPr>
-          <p:cNvPr id="22" name="Text 20"/>
-          <p:cNvSpPr/>
-          <p:nvPr/>
-        </p:nvSpPr>
-        <p:spPr>
-          <a:xfrm>
-            <a:off x="777240" y="3611880"/>
-            <a:ext cx="7132320" cy="274320"/>
-          </a:xfrm>
-          <a:prstGeom prst="rect">
-            <a:avLst/>
-          </a:prstGeom>
-          <a:noFill/>
-          <a:ln/>
-        </p:spPr>
-        <p:txBody>
-          <a:bodyPr wrap="square" rtlCol="0" anchor="ctr"/>
-          <a:lstStyle/>
-          <a:p>
-            <a:pPr indent="0" marL="0">
-              <a:buNone/>
-            </a:pPr>
-            <a:r>
-              <a:rPr lang="en-US" sz="1100" dirty="0">
-                <a:solidFill>
-                  <a:srgbClr val="C0392B"/>
-                </a:solidFill>
-              </a:rPr>
-              <a:t>Sem evidência de liderança de equipa  ·  Experiência em reestruturações limitada</a:t>
-            </a:r>
-            <a:endParaRPr lang="en-US" sz="1100" dirty="0"/>
-          </a:p>
-        </p:txBody>
-      </p:sp>
-    </p:spTree>
-  </p:cSld>
-  <p:clrMapOvr>
-    <a:masterClrMapping/>
-  </p:clrMapOvr>
-</p:sld>
-</file>
-
-<file path=ppt/slides/slide6.xml><?xml version="1.0" encoding="utf-8"?>
-<p:sld xmlns:a="http://schemas.openxmlformats.org/drawingml/2006/main" xmlns:r="http://schemas.openxmlformats.org/officeDocument/2006/relationships" xmlns:p="http://schemas.openxmlformats.org/presentationml/2006/main">
-  <p:cSld name="Slide 6">
-    <p:bg>
-      <p:bgPr>
-        <a:solidFill>
-          <a:srgbClr val="1E2761"/>
-        </a:solidFill>
-      </p:bgPr>
-    </p:bg>
-    <p:spTree>
-      <p:nvGrpSpPr>
-        <p:cNvPr id="1" name=""/>
-        <p:cNvGrpSpPr/>
-        <p:nvPr/>
-      </p:nvGrpSpPr>
-      <p:grpSpPr>
-        <a:xfrm>
-          <a:off x="0" y="0"/>
-          <a:ext cx="0" cy="0"/>
-          <a:chOff x="0" y="0"/>
-          <a:chExt cx="0" cy="0"/>
-        </a:xfrm>
-      </p:grpSpPr>
-      <p:sp>
-        <p:nvSpPr>
           <p:cNvPr id="2" name="Shape 0"/>
           <p:cNvSpPr/>
           <p:nvPr/>
@@ -4466,6 +3693,13 @@
             <a:prstDash val="solid"/>
           </a:ln>
         </p:spPr>
+        <p:txBody>
+          <a:bodyPr/>
+          <a:lstStyle/>
+          <a:p>
+            <a:endParaRPr lang="en-US"/>
+          </a:p>
+        </p:txBody>
       </p:sp>
       <p:sp>
         <p:nvSpPr>
@@ -4491,6 +3725,13 @@
             <a:prstDash val="solid"/>
           </a:ln>
         </p:spPr>
+        <p:txBody>
+          <a:bodyPr/>
+          <a:lstStyle/>
+          <a:p>
+            <a:endParaRPr lang="en-US"/>
+          </a:p>
+        </p:txBody>
       </p:sp>
       <p:sp>
         <p:nvSpPr>
@@ -4513,7 +3754,7 @@
           <a:bodyPr wrap="square" rtlCol="0" anchor="ctr"/>
           <a:lstStyle/>
           <a:p>
-            <a:pPr algn="ctr" indent="0" marL="0">
+            <a:pPr marL="0" indent="0" algn="ctr">
               <a:buNone/>
             </a:pPr>
             <a:r>
@@ -4549,7 +3790,7 @@
           <a:bodyPr wrap="square" rtlCol="0" anchor="ctr"/>
           <a:lstStyle/>
           <a:p>
-            <a:pPr algn="ctr" indent="0" marL="0">
+            <a:pPr marL="0" indent="0" algn="ctr">
               <a:buNone/>
             </a:pPr>
             <a:r>
@@ -4569,45 +3810,6 @@
       </p:sp>
       <p:sp>
         <p:nvSpPr>
-          <p:cNvPr id="6" name="Text 4"/>
-          <p:cNvSpPr/>
-          <p:nvPr/>
-        </p:nvSpPr>
-        <p:spPr>
-          <a:xfrm>
-            <a:off x="1371600" y="2606040"/>
-            <a:ext cx="6400800" cy="457200"/>
-          </a:xfrm>
-          <a:prstGeom prst="rect">
-            <a:avLst/>
-          </a:prstGeom>
-          <a:noFill/>
-          <a:ln/>
-        </p:spPr>
-        <p:txBody>
-          <a:bodyPr wrap="square" rtlCol="0" anchor="ctr"/>
-          <a:lstStyle/>
-          <a:p>
-            <a:pPr algn="ctr" indent="0" marL="0">
-              <a:buNone/>
-            </a:pPr>
-            <a:r>
-              <a:rPr lang="en-US" sz="1800" dirty="0">
-                <a:solidFill>
-                  <a:srgbClr val="CADCFC"/>
-                </a:solidFill>
-                <a:latin typeface="Calibri" pitchFamily="34" charset="0"/>
-                <a:ea typeface="Calibri" pitchFamily="34" charset="-122"/>
-                <a:cs typeface="Calibri" pitchFamily="34" charset="-120"/>
-              </a:rPr>
-              <a:t>CV Matcher em ação</a:t>
-            </a:r>
-            <a:endParaRPr lang="en-US" sz="1800" dirty="0"/>
-          </a:p>
-        </p:txBody>
-      </p:sp>
-      <p:sp>
-        <p:nvSpPr>
           <p:cNvPr id="7" name="Text 5"/>
           <p:cNvSpPr/>
           <p:nvPr/>
@@ -4627,7 +3829,7 @@
           <a:bodyPr wrap="square" rtlCol="0" anchor="ctr"/>
           <a:lstStyle/>
           <a:p>
-            <a:pPr algn="ctr" indent="0" marL="0">
+            <a:pPr marL="0" indent="0" algn="ctr">
               <a:buNone/>
             </a:pPr>
             <a:r>
@@ -4943,4 +4145,319 @@
     </a:ext>
   </a:extLst>
 </a:theme>
+</file>
+
+<file path=ppt/theme/theme2.xml><?xml version="1.0" encoding="utf-8"?>
+<a:theme xmlns:a="http://schemas.openxmlformats.org/drawingml/2006/main" name="Office Theme">
+  <a:themeElements>
+    <a:clrScheme name="Office">
+      <a:dk1>
+        <a:sysClr val="windowText" lastClr="000000"/>
+      </a:dk1>
+      <a:lt1>
+        <a:sysClr val="window" lastClr="FFFFFF"/>
+      </a:lt1>
+      <a:dk2>
+        <a:srgbClr val="0E2841"/>
+      </a:dk2>
+      <a:lt2>
+        <a:srgbClr val="E8E8E8"/>
+      </a:lt2>
+      <a:accent1>
+        <a:srgbClr val="156082"/>
+      </a:accent1>
+      <a:accent2>
+        <a:srgbClr val="E97132"/>
+      </a:accent2>
+      <a:accent3>
+        <a:srgbClr val="196B24"/>
+      </a:accent3>
+      <a:accent4>
+        <a:srgbClr val="0F9ED5"/>
+      </a:accent4>
+      <a:accent5>
+        <a:srgbClr val="A02B93"/>
+      </a:accent5>
+      <a:accent6>
+        <a:srgbClr val="4EA72E"/>
+      </a:accent6>
+      <a:hlink>
+        <a:srgbClr val="467886"/>
+      </a:hlink>
+      <a:folHlink>
+        <a:srgbClr val="96607D"/>
+      </a:folHlink>
+    </a:clrScheme>
+    <a:fontScheme name="Office">
+      <a:majorFont>
+        <a:latin typeface="Aptos Display" panose="02110004020202020204"/>
+        <a:ea typeface=""/>
+        <a:cs typeface=""/>
+        <a:font script="Jpan" typeface="游ゴシック Light"/>
+        <a:font script="Hang" typeface="맑은 고딕"/>
+        <a:font script="Hans" typeface="等线 Light"/>
+        <a:font script="Hant" typeface="新細明體"/>
+        <a:font script="Arab" typeface="Times New Roman"/>
+        <a:font script="Hebr" typeface="Times New Roman"/>
+        <a:font script="Thai" typeface="Angsana New"/>
+        <a:font script="Ethi" typeface="Nyala"/>
+        <a:font script="Beng" typeface="Vrinda"/>
+        <a:font script="Gujr" typeface="Shruti"/>
+        <a:font script="Khmr" typeface="MoolBoran"/>
+        <a:font script="Knda" typeface="Tunga"/>
+        <a:font script="Guru" typeface="Raavi"/>
+        <a:font script="Cans" typeface="Euphemia"/>
+        <a:font script="Cher" typeface="Plantagenet Cherokee"/>
+        <a:font script="Yiii" typeface="Microsoft Yi Baiti"/>
+        <a:font script="Tibt" typeface="Microsoft Himalaya"/>
+        <a:font script="Thaa" typeface="MV Boli"/>
+        <a:font script="Deva" typeface="Mangal"/>
+        <a:font script="Telu" typeface="Gautami"/>
+        <a:font script="Taml" typeface="Latha"/>
+        <a:font script="Syrc" typeface="Estrangelo Edessa"/>
+        <a:font script="Orya" typeface="Kalinga"/>
+        <a:font script="Mlym" typeface="Kartika"/>
+        <a:font script="Laoo" typeface="DokChampa"/>
+        <a:font script="Sinh" typeface="Iskoola Pota"/>
+        <a:font script="Mong" typeface="Mongolian Baiti"/>
+        <a:font script="Viet" typeface="Times New Roman"/>
+        <a:font script="Uigh" typeface="Microsoft Uighur"/>
+        <a:font script="Geor" typeface="Sylfaen"/>
+        <a:font script="Armn" typeface="Arial"/>
+        <a:font script="Bugi" typeface="Leelawadee UI"/>
+        <a:font script="Bopo" typeface="Microsoft JhengHei"/>
+        <a:font script="Java" typeface="Javanese Text"/>
+        <a:font script="Lisu" typeface="Segoe UI"/>
+        <a:font script="Mymr" typeface="Myanmar Text"/>
+        <a:font script="Nkoo" typeface="Ebrima"/>
+        <a:font script="Olck" typeface="Nirmala UI"/>
+        <a:font script="Osma" typeface="Ebrima"/>
+        <a:font script="Phag" typeface="Phagspa"/>
+        <a:font script="Syrn" typeface="Estrangelo Edessa"/>
+        <a:font script="Syrj" typeface="Estrangelo Edessa"/>
+        <a:font script="Syre" typeface="Estrangelo Edessa"/>
+        <a:font script="Sora" typeface="Nirmala UI"/>
+        <a:font script="Tale" typeface="Microsoft Tai Le"/>
+        <a:font script="Talu" typeface="Microsoft New Tai Lue"/>
+        <a:font script="Tfng" typeface="Ebrima"/>
+      </a:majorFont>
+      <a:minorFont>
+        <a:latin typeface="Aptos" panose="02110004020202020204"/>
+        <a:ea typeface=""/>
+        <a:cs typeface=""/>
+        <a:font script="Jpan" typeface="游ゴシック"/>
+        <a:font script="Hang" typeface="맑은 고딕"/>
+        <a:font script="Hans" typeface="等线"/>
+        <a:font script="Hant" typeface="新細明體"/>
+        <a:font script="Arab" typeface="Arial"/>
+        <a:font script="Hebr" typeface="Arial"/>
+        <a:font script="Thai" typeface="Cordia New"/>
+        <a:font script="Ethi" typeface="Nyala"/>
+        <a:font script="Beng" typeface="Vrinda"/>
+        <a:font script="Gujr" typeface="Shruti"/>
+        <a:font script="Khmr" typeface="DaunPenh"/>
+        <a:font script="Knda" typeface="Tunga"/>
+        <a:font script="Guru" typeface="Raavi"/>
+        <a:font script="Cans" typeface="Euphemia"/>
+        <a:font script="Cher" typeface="Plantagenet Cherokee"/>
+        <a:font script="Yiii" typeface="Microsoft Yi Baiti"/>
+        <a:font script="Tibt" typeface="Microsoft Himalaya"/>
+        <a:font script="Thaa" typeface="MV Boli"/>
+        <a:font script="Deva" typeface="Mangal"/>
+        <a:font script="Telu" typeface="Gautami"/>
+        <a:font script="Taml" typeface="Latha"/>
+        <a:font script="Syrc" typeface="Estrangelo Edessa"/>
+        <a:font script="Orya" typeface="Kalinga"/>
+        <a:font script="Mlym" typeface="Kartika"/>
+        <a:font script="Laoo" typeface="DokChampa"/>
+        <a:font script="Sinh" typeface="Iskoola Pota"/>
+        <a:font script="Mong" typeface="Mongolian Baiti"/>
+        <a:font script="Viet" typeface="Arial"/>
+        <a:font script="Uigh" typeface="Microsoft Uighur"/>
+        <a:font script="Geor" typeface="Sylfaen"/>
+        <a:font script="Armn" typeface="Arial"/>
+        <a:font script="Bugi" typeface="Leelawadee UI"/>
+        <a:font script="Bopo" typeface="Microsoft JhengHei"/>
+        <a:font script="Java" typeface="Javanese Text"/>
+        <a:font script="Lisu" typeface="Segoe UI"/>
+        <a:font script="Mymr" typeface="Myanmar Text"/>
+        <a:font script="Nkoo" typeface="Ebrima"/>
+        <a:font script="Olck" typeface="Nirmala UI"/>
+        <a:font script="Osma" typeface="Ebrima"/>
+        <a:font script="Phag" typeface="Phagspa"/>
+        <a:font script="Syrn" typeface="Estrangelo Edessa"/>
+        <a:font script="Syrj" typeface="Estrangelo Edessa"/>
+        <a:font script="Syre" typeface="Estrangelo Edessa"/>
+        <a:font script="Sora" typeface="Nirmala UI"/>
+        <a:font script="Tale" typeface="Microsoft Tai Le"/>
+        <a:font script="Talu" typeface="Microsoft New Tai Lue"/>
+        <a:font script="Tfng" typeface="Ebrima"/>
+      </a:minorFont>
+    </a:fontScheme>
+    <a:fmtScheme name="Office">
+      <a:fillStyleLst>
+        <a:solidFill>
+          <a:schemeClr val="phClr"/>
+        </a:solidFill>
+        <a:gradFill rotWithShape="1">
+          <a:gsLst>
+            <a:gs pos="0">
+              <a:schemeClr val="phClr">
+                <a:lumMod val="110000"/>
+                <a:satMod val="105000"/>
+                <a:tint val="67000"/>
+              </a:schemeClr>
+            </a:gs>
+            <a:gs pos="50000">
+              <a:schemeClr val="phClr">
+                <a:lumMod val="105000"/>
+                <a:satMod val="103000"/>
+                <a:tint val="73000"/>
+              </a:schemeClr>
+            </a:gs>
+            <a:gs pos="100000">
+              <a:schemeClr val="phClr">
+                <a:lumMod val="105000"/>
+                <a:satMod val="109000"/>
+                <a:tint val="81000"/>
+              </a:schemeClr>
+            </a:gs>
+          </a:gsLst>
+          <a:lin ang="5400000" scaled="0"/>
+        </a:gradFill>
+        <a:gradFill rotWithShape="1">
+          <a:gsLst>
+            <a:gs pos="0">
+              <a:schemeClr val="phClr">
+                <a:satMod val="103000"/>
+                <a:lumMod val="102000"/>
+                <a:tint val="94000"/>
+              </a:schemeClr>
+            </a:gs>
+            <a:gs pos="50000">
+              <a:schemeClr val="phClr">
+                <a:satMod val="110000"/>
+                <a:lumMod val="100000"/>
+                <a:shade val="100000"/>
+              </a:schemeClr>
+            </a:gs>
+            <a:gs pos="100000">
+              <a:schemeClr val="phClr">
+                <a:lumMod val="99000"/>
+                <a:satMod val="120000"/>
+                <a:shade val="78000"/>
+              </a:schemeClr>
+            </a:gs>
+          </a:gsLst>
+          <a:lin ang="5400000" scaled="0"/>
+        </a:gradFill>
+      </a:fillStyleLst>
+      <a:lnStyleLst>
+        <a:ln w="12700" cap="flat" cmpd="sng" algn="ctr">
+          <a:solidFill>
+            <a:schemeClr val="phClr"/>
+          </a:solidFill>
+          <a:prstDash val="solid"/>
+          <a:miter lim="800000"/>
+        </a:ln>
+        <a:ln w="19050" cap="flat" cmpd="sng" algn="ctr">
+          <a:solidFill>
+            <a:schemeClr val="phClr"/>
+          </a:solidFill>
+          <a:prstDash val="solid"/>
+          <a:miter lim="800000"/>
+        </a:ln>
+        <a:ln w="25400" cap="flat" cmpd="sng" algn="ctr">
+          <a:solidFill>
+            <a:schemeClr val="phClr"/>
+          </a:solidFill>
+          <a:prstDash val="solid"/>
+          <a:miter lim="800000"/>
+        </a:ln>
+      </a:lnStyleLst>
+      <a:effectStyleLst>
+        <a:effectStyle>
+          <a:effectLst/>
+        </a:effectStyle>
+        <a:effectStyle>
+          <a:effectLst/>
+        </a:effectStyle>
+        <a:effectStyle>
+          <a:effectLst>
+            <a:outerShdw blurRad="57150" dist="19050" dir="5400000" algn="ctr" rotWithShape="0">
+              <a:srgbClr val="000000">
+                <a:alpha val="63000"/>
+              </a:srgbClr>
+            </a:outerShdw>
+          </a:effectLst>
+        </a:effectStyle>
+      </a:effectStyleLst>
+      <a:bgFillStyleLst>
+        <a:solidFill>
+          <a:schemeClr val="phClr"/>
+        </a:solidFill>
+        <a:solidFill>
+          <a:schemeClr val="phClr">
+            <a:tint val="95000"/>
+            <a:satMod val="170000"/>
+          </a:schemeClr>
+        </a:solidFill>
+        <a:gradFill rotWithShape="1">
+          <a:gsLst>
+            <a:gs pos="0">
+              <a:schemeClr val="phClr">
+                <a:tint val="93000"/>
+                <a:satMod val="150000"/>
+                <a:shade val="98000"/>
+                <a:lumMod val="102000"/>
+              </a:schemeClr>
+            </a:gs>
+            <a:gs pos="50000">
+              <a:schemeClr val="phClr">
+                <a:tint val="98000"/>
+                <a:satMod val="130000"/>
+                <a:shade val="90000"/>
+                <a:lumMod val="103000"/>
+              </a:schemeClr>
+            </a:gs>
+            <a:gs pos="100000">
+              <a:schemeClr val="phClr">
+                <a:shade val="63000"/>
+                <a:satMod val="120000"/>
+              </a:schemeClr>
+            </a:gs>
+          </a:gsLst>
+          <a:lin ang="5400000" scaled="0"/>
+        </a:gradFill>
+      </a:bgFillStyleLst>
+    </a:fmtScheme>
+  </a:themeElements>
+  <a:objectDefaults>
+    <a:lnDef>
+      <a:spPr/>
+      <a:bodyPr/>
+      <a:lstStyle/>
+      <a:style>
+        <a:lnRef idx="2">
+          <a:schemeClr val="accent1"/>
+        </a:lnRef>
+        <a:fillRef idx="0">
+          <a:schemeClr val="accent1"/>
+        </a:fillRef>
+        <a:effectRef idx="1">
+          <a:schemeClr val="accent1"/>
+        </a:effectRef>
+        <a:fontRef idx="minor">
+          <a:schemeClr val="tx1"/>
+        </a:fontRef>
+      </a:style>
+    </a:lnDef>
+  </a:objectDefaults>
+  <a:extraClrSchemeLst/>
+  <a:extLst>
+    <a:ext uri="{05A4C25C-085E-4340-85A3-A5531E510DB2}">
+      <thm15:themeFamily xmlns:thm15="http://schemas.microsoft.com/office/thememl/2012/main" name="Office Theme" id="{2E142A2C-CD16-42D6-873A-C26D2A0506FA}" vid="{1BDDFF52-6CD6-40A5-AB3C-68EB2F1E4D0A}"/>
+    </a:ext>
+  </a:extLst>
+</a:theme>
 </file>